--- a/lessons/lesson-04/slides.pptx
+++ b/lessons/lesson-04/slides.pptx
@@ -2,30 +2,30 @@
 <file path=ppt/presentation.xml><?xml version="1.0" encoding="utf-8"?>
 <p:presentation xmlns:p="http://schemas.openxmlformats.org/presentationml/2006/main">
   <p:sldMasterIdLst>
-    <p:sldMasterId xmlns:r="http://schemas.openxmlformats.org/officeDocument/2006/relationships" id="2147483648" r:id="Rd900f51899974b3a"/>
+    <p:sldMasterId xmlns:r="http://schemas.openxmlformats.org/officeDocument/2006/relationships" id="2147483648" r:id="R31e76e4ff19b4d56"/>
   </p:sldMasterIdLst>
   <p:notesMasterIdLst>
-    <p:notesMasterId xmlns:r="http://schemas.openxmlformats.org/officeDocument/2006/relationships" r:id="R499d3cd6183545b8"/>
+    <p:notesMasterId xmlns:r="http://schemas.openxmlformats.org/officeDocument/2006/relationships" r:id="R4652815f21864d9d"/>
   </p:notesMasterIdLst>
   <p:sldIdLst>
-    <p:sldId xmlns:r="http://schemas.openxmlformats.org/officeDocument/2006/relationships" id="256" r:id="Ra8965c11846b487c"/>
-    <p:sldId xmlns:r="http://schemas.openxmlformats.org/officeDocument/2006/relationships" id="257" r:id="Rd097f41535494bf5"/>
-    <p:sldId xmlns:r="http://schemas.openxmlformats.org/officeDocument/2006/relationships" id="258" r:id="Rb32ca4f4b27e44dd"/>
-    <p:sldId xmlns:r="http://schemas.openxmlformats.org/officeDocument/2006/relationships" id="259" r:id="R9ce381e90a4c4654"/>
-    <p:sldId xmlns:r="http://schemas.openxmlformats.org/officeDocument/2006/relationships" id="260" r:id="Rb4450c44d21d4c59"/>
-    <p:sldId xmlns:r="http://schemas.openxmlformats.org/officeDocument/2006/relationships" id="261" r:id="R5d32aaa92d58494d"/>
-    <p:sldId xmlns:r="http://schemas.openxmlformats.org/officeDocument/2006/relationships" id="262" r:id="Rb065250441454060"/>
-    <p:sldId xmlns:r="http://schemas.openxmlformats.org/officeDocument/2006/relationships" id="263" r:id="R7f9f0c7ff9984e52"/>
-    <p:sldId xmlns:r="http://schemas.openxmlformats.org/officeDocument/2006/relationships" id="264" r:id="Ra042be24463248a0"/>
-    <p:sldId xmlns:r="http://schemas.openxmlformats.org/officeDocument/2006/relationships" id="265" r:id="R96987a90e96548ed"/>
-    <p:sldId xmlns:r="http://schemas.openxmlformats.org/officeDocument/2006/relationships" id="266" r:id="Rf6d7ee6b2ba8408d"/>
-    <p:sldId xmlns:r="http://schemas.openxmlformats.org/officeDocument/2006/relationships" id="267" r:id="R196693048e8249ed"/>
-    <p:sldId xmlns:r="http://schemas.openxmlformats.org/officeDocument/2006/relationships" id="268" r:id="Rd03a678029314f15"/>
-    <p:sldId xmlns:r="http://schemas.openxmlformats.org/officeDocument/2006/relationships" id="269" r:id="R2b6ec506c26e467d"/>
-    <p:sldId xmlns:r="http://schemas.openxmlformats.org/officeDocument/2006/relationships" id="270" r:id="R154e69a86c804a3d"/>
-    <p:sldId xmlns:r="http://schemas.openxmlformats.org/officeDocument/2006/relationships" id="271" r:id="Rba70eedf06a24a41"/>
-    <p:sldId xmlns:r="http://schemas.openxmlformats.org/officeDocument/2006/relationships" id="272" r:id="R7c2e10f720a54641"/>
-    <p:sldId xmlns:r="http://schemas.openxmlformats.org/officeDocument/2006/relationships" id="273" r:id="Rf958260480e44ce7"/>
+    <p:sldId xmlns:r="http://schemas.openxmlformats.org/officeDocument/2006/relationships" id="256" r:id="R8757889be44544b0"/>
+    <p:sldId xmlns:r="http://schemas.openxmlformats.org/officeDocument/2006/relationships" id="257" r:id="R3959d370dfdd4c9f"/>
+    <p:sldId xmlns:r="http://schemas.openxmlformats.org/officeDocument/2006/relationships" id="258" r:id="Rcb546209354b42da"/>
+    <p:sldId xmlns:r="http://schemas.openxmlformats.org/officeDocument/2006/relationships" id="259" r:id="R678fdf432ea34014"/>
+    <p:sldId xmlns:r="http://schemas.openxmlformats.org/officeDocument/2006/relationships" id="260" r:id="R4705564a78784c21"/>
+    <p:sldId xmlns:r="http://schemas.openxmlformats.org/officeDocument/2006/relationships" id="261" r:id="R46b5aa4efde54277"/>
+    <p:sldId xmlns:r="http://schemas.openxmlformats.org/officeDocument/2006/relationships" id="262" r:id="Ra0f6c5f238d545ab"/>
+    <p:sldId xmlns:r="http://schemas.openxmlformats.org/officeDocument/2006/relationships" id="263" r:id="Rf781d29dc44b47ed"/>
+    <p:sldId xmlns:r="http://schemas.openxmlformats.org/officeDocument/2006/relationships" id="264" r:id="Radcc4763c27b4b3c"/>
+    <p:sldId xmlns:r="http://schemas.openxmlformats.org/officeDocument/2006/relationships" id="265" r:id="R903eff0e7e23481e"/>
+    <p:sldId xmlns:r="http://schemas.openxmlformats.org/officeDocument/2006/relationships" id="266" r:id="R372d93d2fc634ae9"/>
+    <p:sldId xmlns:r="http://schemas.openxmlformats.org/officeDocument/2006/relationships" id="267" r:id="R7e59665fb1f94d78"/>
+    <p:sldId xmlns:r="http://schemas.openxmlformats.org/officeDocument/2006/relationships" id="268" r:id="Rd9da7d700ebe43f3"/>
+    <p:sldId xmlns:r="http://schemas.openxmlformats.org/officeDocument/2006/relationships" id="269" r:id="R0823af33fee24711"/>
+    <p:sldId xmlns:r="http://schemas.openxmlformats.org/officeDocument/2006/relationships" id="270" r:id="R6c38b44c5aed491d"/>
+    <p:sldId xmlns:r="http://schemas.openxmlformats.org/officeDocument/2006/relationships" id="271" r:id="R18a2732fe43e4d32"/>
+    <p:sldId xmlns:r="http://schemas.openxmlformats.org/officeDocument/2006/relationships" id="272" r:id="Rc6f8dc6479234ae3"/>
+    <p:sldId xmlns:r="http://schemas.openxmlformats.org/officeDocument/2006/relationships" id="273" r:id="R9bd92cee892f4b95"/>
   </p:sldIdLst>
   <p:sldSz cx="12192000" cy="6858000"/>
   <p:notesSz cx="6858000" cy="9144000"/>
@@ -405,7 +405,92 @@
           <a:lstStyle xmlns:a="http://schemas.openxmlformats.org/drawingml/2006/main"/>
           <a:p xmlns:a="http://schemas.openxmlformats.org/drawingml/2006/main">
             <a:r>
-              <a:t>页面标题：第4讲 AI 辅助论文精读与深度分析</a:t>
+              <a:t>页面：P01 第4讲 AI 辅助论文精读与深度分析</a:t>
+            </a:r>
+          </a:p>
+          <a:p xmlns:a="http://schemas.openxmlformats.org/drawingml/2006/main">
+            <a:r>
+              <a:t/>
+            </a:r>
+          </a:p>
+          <a:p xmlns:a="http://schemas.openxmlformats.org/drawingml/2006/main">
+            <a:r>
+              <a:t>讲义位置：本课讲义；见逐页母稿映射表</a:t>
+            </a:r>
+          </a:p>
+          <a:p xmlns:a="http://schemas.openxmlformats.org/drawingml/2006/main">
+            <a:r>
+              <a:t/>
+            </a:r>
+          </a:p>
+          <a:p xmlns:a="http://schemas.openxmlformats.org/drawingml/2006/main">
+            <a:r>
+              <a:t>屏显核对：</a:t>
+            </a:r>
+          </a:p>
+          <a:p xmlns:a="http://schemas.openxmlformats.org/drawingml/2006/main">
+            <a:r>
+              <a:t>第4讲 AI 辅助论文精读与深度分析</a:t>
+            </a:r>
+          </a:p>
+          <a:p xmlns:a="http://schemas.openxmlformats.org/drawingml/2006/main">
+            <a:r>
+              <a:t/>
+            </a:r>
+          </a:p>
+          <a:p xmlns:a="http://schemas.openxmlformats.org/drawingml/2006/main">
+            <a:r>
+              <a:t>教师讲述：</a:t>
+            </a:r>
+          </a:p>
+          <a:p xmlns:a="http://schemas.openxmlformats.org/drawingml/2006/main">
+            <a:r>
+              <a:t>开场放下论文清单。本课要处理的是：当 AI 已经能生成结构完整的论文摘要时，研究者怎样把精读变成可复查的"原文位置—主张—人工判断"追踪关系。</a:t>
+            </a:r>
+          </a:p>
+          <a:p xmlns:a="http://schemas.openxmlformats.org/drawingml/2006/main">
+            <a:r>
+              <a:t/>
+            </a:r>
+          </a:p>
+          <a:p xmlns:a="http://schemas.openxmlformats.org/drawingml/2006/main">
+            <a:r>
+              <a:t>学生动作：</a:t>
+            </a:r>
+          </a:p>
+          <a:p xmlns:a="http://schemas.openxmlformats.org/drawingml/2006/main">
+            <a:r>
+              <a:t>不展开课程行政信息，直接进入下一页回扣。</a:t>
+            </a:r>
+          </a:p>
+          <a:p xmlns:a="http://schemas.openxmlformats.org/drawingml/2006/main">
+            <a:r>
+              <a:t/>
+            </a:r>
+          </a:p>
+          <a:p xmlns:a="http://schemas.openxmlformats.org/drawingml/2006/main">
+            <a:r>
+              <a:t>来源与边界：</a:t>
+            </a:r>
+          </a:p>
+          <a:p xmlns:a="http://schemas.openxmlformats.org/drawingml/2006/main">
+            <a:r>
+              <a:t>课程定位以 [syllabus.md](../../course/syllabus.md) 与 [备课规划.md](../备课规划.md) 第 4 课段为准。</a:t>
+            </a:r>
+          </a:p>
+          <a:p xmlns:a="http://schemas.openxmlformats.org/drawingml/2006/main">
+            <a:r>
+              <a:t/>
+            </a:r>
+          </a:p>
+          <a:p xmlns:a="http://schemas.openxmlformats.org/drawingml/2006/main">
+            <a:r>
+              <a:t>---</a:t>
+            </a:r>
+          </a:p>
+          <a:p xmlns:a="http://schemas.openxmlformats.org/drawingml/2006/main">
+            <a:r>
+              <a:t/>
             </a:r>
           </a:p>
           <a:p xmlns:a="http://schemas.openxmlformats.org/drawingml/2006/main">
@@ -415,7 +500,17 @@
           </a:p>
           <a:p xmlns:a="http://schemas.openxmlformats.org/drawingml/2006/main">
             <a:r>
-              <a:t>- 本页仅使用课程内部规则与教学材料。</a:t>
+              <a:t/>
+            </a:r>
+          </a:p>
+          <a:p xmlns:a="http://schemas.openxmlformats.org/drawingml/2006/main">
+            <a:r>
+              <a:t>- 本课 handout.md 与 slides.md</a:t>
+            </a:r>
+          </a:p>
+          <a:p xmlns:a="http://schemas.openxmlformats.org/drawingml/2006/main">
+            <a:r>
+              <a:t/>
             </a:r>
           </a:p>
           <a:p xmlns:a="http://schemas.openxmlformats.org/drawingml/2006/main">
@@ -490,7 +585,152 @@
           <a:lstStyle xmlns:a="http://schemas.openxmlformats.org/drawingml/2006/main"/>
           <a:p xmlns:a="http://schemas.openxmlformats.org/drawingml/2006/main">
             <a:r>
-              <a:t>页面标题：阅读卡字段</a:t>
+              <a:t>页面：P10 阅读卡字段</a:t>
+            </a:r>
+          </a:p>
+          <a:p xmlns:a="http://schemas.openxmlformats.org/drawingml/2006/main">
+            <a:r>
+              <a:t/>
+            </a:r>
+          </a:p>
+          <a:p xmlns:a="http://schemas.openxmlformats.org/drawingml/2006/main">
+            <a:r>
+              <a:t>讲义位置：本课讲义；见逐页母稿映射表</a:t>
+            </a:r>
+          </a:p>
+          <a:p xmlns:a="http://schemas.openxmlformats.org/drawingml/2006/main">
+            <a:r>
+              <a:t/>
+            </a:r>
+          </a:p>
+          <a:p xmlns:a="http://schemas.openxmlformats.org/drawingml/2006/main">
+            <a:r>
+              <a:t>屏显核对：</a:t>
+            </a:r>
+          </a:p>
+          <a:p xmlns:a="http://schemas.openxmlformats.org/drawingml/2006/main">
+            <a:r>
+              <a:t>阅读卡最小字段：</a:t>
+            </a:r>
+          </a:p>
+          <a:p xmlns:a="http://schemas.openxmlformats.org/drawingml/2006/main">
+            <a:r>
+              <a:t>- 论文 / 证据角色（承接第 3 课）</a:t>
+            </a:r>
+          </a:p>
+          <a:p xmlns:a="http://schemas.openxmlformats.org/drawingml/2006/main">
+            <a:r>
+              <a:t>- 来源核验状态</a:t>
+            </a:r>
+          </a:p>
+          <a:p xmlns:a="http://schemas.openxmlformats.org/drawingml/2006/main">
+            <a:r>
+              <a:t>- 中心问题（一句话，核验后）</a:t>
+            </a:r>
+          </a:p>
+          <a:p xmlns:a="http://schemas.openxmlformats.org/drawingml/2006/main">
+            <a:r>
+              <a:t>- 作者主张（每条标注原文位置）</a:t>
+            </a:r>
+          </a:p>
+          <a:p xmlns:a="http://schemas.openxmlformats.org/drawingml/2006/main">
+            <a:r>
+              <a:t>- 原文证据（指标/对照/样本/限定）</a:t>
+            </a:r>
+          </a:p>
+          <a:p xmlns:a="http://schemas.openxmlformats.org/drawingml/2006/main">
+            <a:r>
+              <a:t>- 局限与边界（作者自述 + 个人判断）</a:t>
+            </a:r>
+          </a:p>
+          <a:p xmlns:a="http://schemas.openxmlformats.org/drawingml/2006/main">
+            <a:r>
+              <a:t>- 个人判断（适用性/待验证/与项目关系）</a:t>
+            </a:r>
+          </a:p>
+          <a:p xmlns:a="http://schemas.openxmlformats.org/drawingml/2006/main">
+            <a:r>
+              <a:t>- AI 建议（待核验）</a:t>
+            </a:r>
+          </a:p>
+          <a:p xmlns:a="http://schemas.openxmlformats.org/drawingml/2006/main">
+            <a:r>
+              <a:t>- AI 偏差审计（错误/遗漏，或已检查风险与依据）</a:t>
+            </a:r>
+          </a:p>
+          <a:p xmlns:a="http://schemas.openxmlformats.org/drawingml/2006/main">
+            <a:r>
+              <a:t>- 核验状态</a:t>
+            </a:r>
+          </a:p>
+          <a:p xmlns:a="http://schemas.openxmlformats.org/drawingml/2006/main">
+            <a:r>
+              <a:t/>
+            </a:r>
+          </a:p>
+          <a:p xmlns:a="http://schemas.openxmlformats.org/drawingml/2006/main">
+            <a:r>
+              <a:t>&gt; 没有原文位置的主张，不能进入"作者主张"栏。</a:t>
+            </a:r>
+          </a:p>
+          <a:p xmlns:a="http://schemas.openxmlformats.org/drawingml/2006/main">
+            <a:r>
+              <a:t/>
+            </a:r>
+          </a:p>
+          <a:p xmlns:a="http://schemas.openxmlformats.org/drawingml/2006/main">
+            <a:r>
+              <a:t>教师讲述：</a:t>
+            </a:r>
+          </a:p>
+          <a:p xmlns:a="http://schemas.openxmlformats.org/drawingml/2006/main">
+            <a:r>
+              <a:t>阅读卡是本课产出，也是第 5 课证据地图的输入。每条作者主张必须标注原文位置；所有字段有值或写明不适用理由才算完整。`pending` 只留线索区；`verified-with-caveat` 保留限定且不单独支撑 `stable`；`rejected` 仅留审计。</a:t>
+            </a:r>
+          </a:p>
+          <a:p xmlns:a="http://schemas.openxmlformats.org/drawingml/2006/main">
+            <a:r>
+              <a:t/>
+            </a:r>
+          </a:p>
+          <a:p xmlns:a="http://schemas.openxmlformats.org/drawingml/2006/main">
+            <a:r>
+              <a:t>学生动作：</a:t>
+            </a:r>
+          </a:p>
+          <a:p xmlns:a="http://schemas.openxmlformats.org/drawingml/2006/main">
+            <a:r>
+              <a:t>无。进入演示。</a:t>
+            </a:r>
+          </a:p>
+          <a:p xmlns:a="http://schemas.openxmlformats.org/drawingml/2006/main">
+            <a:r>
+              <a:t/>
+            </a:r>
+          </a:p>
+          <a:p xmlns:a="http://schemas.openxmlformats.org/drawingml/2006/main">
+            <a:r>
+              <a:t>来源与边界：</a:t>
+            </a:r>
+          </a:p>
+          <a:p xmlns:a="http://schemas.openxmlformats.org/drawingml/2006/main">
+            <a:r>
+              <a:t>讲义 §四 阅读卡字段；[starter-template.md](../../course/starter-template.md) 工件追踪。</a:t>
+            </a:r>
+          </a:p>
+          <a:p xmlns:a="http://schemas.openxmlformats.org/drawingml/2006/main">
+            <a:r>
+              <a:t/>
+            </a:r>
+          </a:p>
+          <a:p xmlns:a="http://schemas.openxmlformats.org/drawingml/2006/main">
+            <a:r>
+              <a:t>---</a:t>
+            </a:r>
+          </a:p>
+          <a:p xmlns:a="http://schemas.openxmlformats.org/drawingml/2006/main">
+            <a:r>
+              <a:t/>
             </a:r>
           </a:p>
           <a:p xmlns:a="http://schemas.openxmlformats.org/drawingml/2006/main">
@@ -500,7 +740,17 @@
           </a:p>
           <a:p xmlns:a="http://schemas.openxmlformats.org/drawingml/2006/main">
             <a:r>
-              <a:t>- 本页仅使用课程内部规则与教学材料。</a:t>
+              <a:t/>
+            </a:r>
+          </a:p>
+          <a:p xmlns:a="http://schemas.openxmlformats.org/drawingml/2006/main">
+            <a:r>
+              <a:t>- 本课 handout.md 与 slides.md</a:t>
+            </a:r>
+          </a:p>
+          <a:p xmlns:a="http://schemas.openxmlformats.org/drawingml/2006/main">
+            <a:r>
+              <a:t/>
             </a:r>
           </a:p>
           <a:p xmlns:a="http://schemas.openxmlformats.org/drawingml/2006/main">
@@ -575,7 +825,142 @@
           <a:lstStyle xmlns:a="http://schemas.openxmlformats.org/drawingml/2006/main"/>
           <a:p xmlns:a="http://schemas.openxmlformats.org/drawingml/2006/main">
             <a:r>
-              <a:t>页面标题：演示：真实原文 vs 待核验 AI 输出</a:t>
+              <a:t>页面：P11 演示：真实原文 vs 待核验 AI 输出</a:t>
+            </a:r>
+          </a:p>
+          <a:p xmlns:a="http://schemas.openxmlformats.org/drawingml/2006/main">
+            <a:r>
+              <a:t/>
+            </a:r>
+          </a:p>
+          <a:p xmlns:a="http://schemas.openxmlformats.org/drawingml/2006/main">
+            <a:r>
+              <a:t>讲义位置：本课讲义；见逐页母稿映射表</a:t>
+            </a:r>
+          </a:p>
+          <a:p xmlns:a="http://schemas.openxmlformats.org/drawingml/2006/main">
+            <a:r>
+              <a:t/>
+            </a:r>
+          </a:p>
+          <a:p xmlns:a="http://schemas.openxmlformats.org/drawingml/2006/main">
+            <a:r>
+              <a:t>屏显核对：</a:t>
+            </a:r>
+          </a:p>
+          <a:p xmlns:a="http://schemas.openxmlformats.org/drawingml/2006/main">
+            <a:r>
+              <a:t>真实论文：Keshav, *How to Read a Paper*, DOI `10.1145/1273445.1273458`</a:t>
+            </a:r>
+          </a:p>
+          <a:p xmlns:a="http://schemas.openxmlformats.org/drawingml/2006/main">
+            <a:r>
+              <a:t/>
+            </a:r>
+          </a:p>
+          <a:p xmlns:a="http://schemas.openxmlformats.org/drawingml/2006/main">
+            <a:r>
+              <a:t>原文定位：p.83 摘要与 §2/§2.1；p.84 §4</a:t>
+            </a:r>
+          </a:p>
+          <a:p xmlns:a="http://schemas.openxmlformats.org/drawingml/2006/main">
+            <a:r>
+              <a:t/>
+            </a:r>
+          </a:p>
+          <a:p xmlns:a="http://schemas.openxmlformats.org/drawingml/2006/main">
+            <a:r>
+              <a:t>课堂构造 AI 输出｜未核验｜非真实模型记录：</a:t>
+            </a:r>
+          </a:p>
+          <a:p xmlns:a="http://schemas.openxmlformats.org/drawingml/2006/main">
+            <a:r>
+              <a:t>- “对照实验证明阅读时间降低 50%”</a:t>
+            </a:r>
+          </a:p>
+          <a:p xmlns:a="http://schemas.openxmlformats.org/drawingml/2006/main">
+            <a:r>
+              <a:t>- “第一遍固定需要 5 分钟”</a:t>
+            </a:r>
+          </a:p>
+          <a:p xmlns:a="http://schemas.openxmlformats.org/drawingml/2006/main">
+            <a:r>
+              <a:t/>
+            </a:r>
+          </a:p>
+          <a:p xmlns:a="http://schemas.openxmlformats.org/drawingml/2006/main">
+            <a:r>
+              <a:t>原文核验：三遍阅读法｜第一遍约 5–10 分钟｜未报告该对照实验</a:t>
+            </a:r>
+          </a:p>
+          <a:p xmlns:a="http://schemas.openxmlformats.org/drawingml/2006/main">
+            <a:r>
+              <a:t/>
+            </a:r>
+          </a:p>
+          <a:p xmlns:a="http://schemas.openxmlformats.org/drawingml/2006/main">
+            <a:r>
+              <a:t>教师讲述：</a:t>
+            </a:r>
+          </a:p>
+          <a:p xmlns:a="http://schemas.openxmlformats.org/drawingml/2006/main">
+            <a:r>
+              <a:t>论文页是真实来源，AI 输出两句是课堂构造，二者不得混为同一证据对象。先让学生在原文中定位，再给判断。</a:t>
+            </a:r>
+          </a:p>
+          <a:p xmlns:a="http://schemas.openxmlformats.org/drawingml/2006/main">
+            <a:r>
+              <a:t/>
+            </a:r>
+          </a:p>
+          <a:p xmlns:a="http://schemas.openxmlformats.org/drawingml/2006/main">
+            <a:r>
+              <a:t>学生动作：</a:t>
+            </a:r>
+          </a:p>
+          <a:p xmlns:a="http://schemas.openxmlformats.org/drawingml/2006/main">
+            <a:r>
+              <a:t>运行前请学生预测：AI 导航的哪一项最可能出错？运行后让学生指出差异点。</a:t>
+            </a:r>
+          </a:p>
+          <a:p xmlns:a="http://schemas.openxmlformats.org/drawingml/2006/main">
+            <a:r>
+              <a:t/>
+            </a:r>
+          </a:p>
+          <a:p xmlns:a="http://schemas.openxmlformats.org/drawingml/2006/main">
+            <a:r>
+              <a:t>来源与边界：</a:t>
+            </a:r>
+          </a:p>
+          <a:p xmlns:a="http://schemas.openxmlformats.org/drawingml/2006/main">
+            <a:r>
+              <a:t>- Keshav, S. "How to Read a Paper." DOI: https://doi.org/10.1145/1273445.1273458</a:t>
+            </a:r>
+          </a:p>
+          <a:p xmlns:a="http://schemas.openxmlformats.org/drawingml/2006/main">
+            <a:r>
+              <a:t>- 公开 PDF：https://cs.uwaterloo.ca/~Brecht/courses/856/readings/how-to-read/keshav-paper-reading.pdf</a:t>
+            </a:r>
+          </a:p>
+          <a:p xmlns:a="http://schemas.openxmlformats.org/drawingml/2006/main">
+            <a:r>
+              <a:t>- AI 输出为课堂构造，非真实模型记录</a:t>
+            </a:r>
+          </a:p>
+          <a:p xmlns:a="http://schemas.openxmlformats.org/drawingml/2006/main">
+            <a:r>
+              <a:t/>
+            </a:r>
+          </a:p>
+          <a:p xmlns:a="http://schemas.openxmlformats.org/drawingml/2006/main">
+            <a:r>
+              <a:t>---</a:t>
+            </a:r>
+          </a:p>
+          <a:p xmlns:a="http://schemas.openxmlformats.org/drawingml/2006/main">
+            <a:r>
+              <a:t/>
             </a:r>
           </a:p>
           <a:p xmlns:a="http://schemas.openxmlformats.org/drawingml/2006/main">
@@ -585,7 +970,17 @@
           </a:p>
           <a:p xmlns:a="http://schemas.openxmlformats.org/drawingml/2006/main">
             <a:r>
-              <a:t>- 本页仅使用课程内部规则与教学材料。</a:t>
+              <a:t/>
+            </a:r>
+          </a:p>
+          <a:p xmlns:a="http://schemas.openxmlformats.org/drawingml/2006/main">
+            <a:r>
+              <a:t>- 本课 handout.md 与 slides.md</a:t>
+            </a:r>
+          </a:p>
+          <a:p xmlns:a="http://schemas.openxmlformats.org/drawingml/2006/main">
+            <a:r>
+              <a:t/>
             </a:r>
           </a:p>
           <a:p xmlns:a="http://schemas.openxmlformats.org/drawingml/2006/main">
@@ -660,7 +1055,132 @@
           <a:lstStyle xmlns:a="http://schemas.openxmlformats.org/drawingml/2006/main"/>
           <a:p xmlns:a="http://schemas.openxmlformats.org/drawingml/2006/main">
             <a:r>
-              <a:t>页面标题：MI 演示：三篇论文如何分工</a:t>
+              <a:t>页面：P12 MI 演示：三篇论文如何分工</a:t>
+            </a:r>
+          </a:p>
+          <a:p xmlns:a="http://schemas.openxmlformats.org/drawingml/2006/main">
+            <a:r>
+              <a:t/>
+            </a:r>
+          </a:p>
+          <a:p xmlns:a="http://schemas.openxmlformats.org/drawingml/2006/main">
+            <a:r>
+              <a:t>讲义位置：本课讲义；见逐页母稿映射表</a:t>
+            </a:r>
+          </a:p>
+          <a:p xmlns:a="http://schemas.openxmlformats.org/drawingml/2006/main">
+            <a:r>
+              <a:t/>
+            </a:r>
+          </a:p>
+          <a:p xmlns:a="http://schemas.openxmlformats.org/drawingml/2006/main">
+            <a:r>
+              <a:t>屏显核对：</a:t>
+            </a:r>
+          </a:p>
+          <a:p xmlns:a="http://schemas.openxmlformats.org/drawingml/2006/main">
+            <a:r>
+              <a:t>公开论文主张｜不含博士生未发表内容</a:t>
+            </a:r>
+          </a:p>
+          <a:p xmlns:a="http://schemas.openxmlformats.org/drawingml/2006/main">
+            <a:r>
+              <a:t/>
+            </a:r>
+          </a:p>
+          <a:p xmlns:a="http://schemas.openxmlformats.org/drawingml/2006/main">
+            <a:r>
+              <a:t>![MI 精读证据阶梯](assets/mi-reading-evidence-ladder.svg)</a:t>
+            </a:r>
+          </a:p>
+          <a:p xmlns:a="http://schemas.openxmlformats.org/drawingml/2006/main">
+            <a:r>
+              <a:t/>
+            </a:r>
+          </a:p>
+          <a:p xmlns:a="http://schemas.openxmlformats.org/drawingml/2006/main">
+            <a:r>
+              <a:t>- C02：同设置正向主证据｜Pythia-410M · IOI · SAE vs PCA</a:t>
+            </a:r>
+          </a:p>
+          <a:p xmlns:a="http://schemas.openxmlformats.org/drawingml/2006/main">
+            <a:r>
+              <a:t>- C16：控制性限制｜可解释 ≠ 足够可控制</a:t>
+            </a:r>
+          </a:p>
+          <a:p xmlns:a="http://schemas.openxmlformats.org/drawingml/2006/main">
+            <a:r>
+              <a:t>- C31：效度威胁｜patching 成功 ≠ 自动因果忠实</a:t>
+            </a:r>
+          </a:p>
+          <a:p xmlns:a="http://schemas.openxmlformats.org/drawingml/2006/main">
+            <a:r>
+              <a:t/>
+            </a:r>
+          </a:p>
+          <a:p xmlns:a="http://schemas.openxmlformats.org/drawingml/2006/main">
+            <a:r>
+              <a:t>&gt; 三条都可进入证据地图，但 caveat 必须一起移动。</a:t>
+            </a:r>
+          </a:p>
+          <a:p xmlns:a="http://schemas.openxmlformats.org/drawingml/2006/main">
+            <a:r>
+              <a:t/>
+            </a:r>
+          </a:p>
+          <a:p xmlns:a="http://schemas.openxmlformats.org/drawingml/2006/main">
+            <a:r>
+              <a:t>教师讲述：</a:t>
+            </a:r>
+          </a:p>
+          <a:p xmlns:a="http://schemas.openxmlformats.org/drawingml/2006/main">
+            <a:r>
+              <a:t>从 P11 的方法校准切换到真实研究争议。让学生看到“主证据、限制证据、效度威胁”不是按赞成/反对分组，而是共同约束一条可用主张。</a:t>
+            </a:r>
+          </a:p>
+          <a:p xmlns:a="http://schemas.openxmlformats.org/drawingml/2006/main">
+            <a:r>
+              <a:t/>
+            </a:r>
+          </a:p>
+          <a:p xmlns:a="http://schemas.openxmlformats.org/drawingml/2006/main">
+            <a:r>
+              <a:t>学生动作：</a:t>
+            </a:r>
+          </a:p>
+          <a:p xmlns:a="http://schemas.openxmlformats.org/drawingml/2006/main">
+            <a:r>
+              <a:t>让学生判断：C31 应标“反驳 C02”，还是“限制 C02 可推出的结论”？</a:t>
+            </a:r>
+          </a:p>
+          <a:p xmlns:a="http://schemas.openxmlformats.org/drawingml/2006/main">
+            <a:r>
+              <a:t/>
+            </a:r>
+          </a:p>
+          <a:p xmlns:a="http://schemas.openxmlformats.org/drawingml/2006/main">
+            <a:r>
+              <a:t>来源与边界：</a:t>
+            </a:r>
+          </a:p>
+          <a:p xmlns:a="http://schemas.openxmlformats.org/drawingml/2006/main">
+            <a:r>
+              <a:t>[mi-reading-card-demo.md](./mi-reading-card-demo.md)；MI-C02/C16/C31 claim-level 位置与 caveat 见 [MI trace](../lesson-03/mi-search-trace-demo.md) §5；图源见 [assets/README.md](./assets/README.md)。</a:t>
+            </a:r>
+          </a:p>
+          <a:p xmlns:a="http://schemas.openxmlformats.org/drawingml/2006/main">
+            <a:r>
+              <a:t/>
+            </a:r>
+          </a:p>
+          <a:p xmlns:a="http://schemas.openxmlformats.org/drawingml/2006/main">
+            <a:r>
+              <a:t>---</a:t>
+            </a:r>
+          </a:p>
+          <a:p xmlns:a="http://schemas.openxmlformats.org/drawingml/2006/main">
+            <a:r>
+              <a:t/>
             </a:r>
           </a:p>
           <a:p xmlns:a="http://schemas.openxmlformats.org/drawingml/2006/main">
@@ -670,7 +1190,17 @@
           </a:p>
           <a:p xmlns:a="http://schemas.openxmlformats.org/drawingml/2006/main">
             <a:r>
-              <a:t>- 本页仅使用课程内部规则与教学材料。</a:t>
+              <a:t/>
+            </a:r>
+          </a:p>
+          <a:p xmlns:a="http://schemas.openxmlformats.org/drawingml/2006/main">
+            <a:r>
+              <a:t>- 本课 handout.md 与 slides.md</a:t>
+            </a:r>
+          </a:p>
+          <a:p xmlns:a="http://schemas.openxmlformats.org/drawingml/2006/main">
+            <a:r>
+              <a:t/>
             </a:r>
           </a:p>
           <a:p xmlns:a="http://schemas.openxmlformats.org/drawingml/2006/main">
@@ -745,7 +1275,152 @@
           <a:lstStyle xmlns:a="http://schemas.openxmlformats.org/drawingml/2006/main"/>
           <a:p xmlns:a="http://schemas.openxmlformats.org/drawingml/2006/main">
             <a:r>
-              <a:t>页面标题：MI 演示：从 patching 成功到受限判断</a:t>
+              <a:t>页面：P13 MI 演示：从 patching 成功到受限判断</a:t>
+            </a:r>
+          </a:p>
+          <a:p xmlns:a="http://schemas.openxmlformats.org/drawingml/2006/main">
+            <a:r>
+              <a:t/>
+            </a:r>
+          </a:p>
+          <a:p xmlns:a="http://schemas.openxmlformats.org/drawingml/2006/main">
+            <a:r>
+              <a:t>讲义位置：本课讲义；见逐页母稿映射表</a:t>
+            </a:r>
+          </a:p>
+          <a:p xmlns:a="http://schemas.openxmlformats.org/drawingml/2006/main">
+            <a:r>
+              <a:t/>
+            </a:r>
+          </a:p>
+          <a:p xmlns:a="http://schemas.openxmlformats.org/drawingml/2006/main">
+            <a:r>
+              <a:t>屏显核对：</a:t>
+            </a:r>
+          </a:p>
+          <a:p xmlns:a="http://schemas.openxmlformats.org/drawingml/2006/main">
+            <a:r>
+              <a:t>初版 AI 归纳｜待核验：</a:t>
+            </a:r>
+          </a:p>
+          <a:p xmlns:a="http://schemas.openxmlformats.org/drawingml/2006/main">
+            <a:r>
+              <a:t>&gt; C02 Fig.3 证明 SAE 特征对 IOI 具有因果忠实性。</a:t>
+            </a:r>
+          </a:p>
+          <a:p xmlns:a="http://schemas.openxmlformats.org/drawingml/2006/main">
+            <a:r>
+              <a:t/>
+            </a:r>
+          </a:p>
+          <a:p xmlns:a="http://schemas.openxmlformats.org/drawingml/2006/main">
+            <a:r>
+              <a:t>原文与对照材料给出的受限判断：</a:t>
+            </a:r>
+          </a:p>
+          <a:p xmlns:a="http://schemas.openxmlformats.org/drawingml/2006/main">
+            <a:r>
+              <a:t>- C02 pp.5-6：该设置下 SAE 用更少 patch / 更小 edit 达到目标 KL</a:t>
+            </a:r>
+          </a:p>
+          <a:p xmlns:a="http://schemas.openxmlformats.org/drawingml/2006/main">
+            <a:r>
+              <a:t>- C02 p.9：重构误差与跨任务泛化仍是限制</a:t>
+            </a:r>
+          </a:p>
+          <a:p xmlns:a="http://schemas.openxmlformats.org/drawingml/2006/main">
+            <a:r>
+              <a:t>- C16：可解释特征的控制能力可能弱于监督字典</a:t>
+            </a:r>
+          </a:p>
+          <a:p xmlns:a="http://schemas.openxmlformats.org/drawingml/2006/main">
+            <a:r>
+              <a:t>- C31：子空间 patching 可能激活 dormant pathway</a:t>
+            </a:r>
+          </a:p>
+          <a:p xmlns:a="http://schemas.openxmlformats.org/drawingml/2006/main">
+            <a:r>
+              <a:t/>
+            </a:r>
+          </a:p>
+          <a:p xmlns:a="http://schemas.openxmlformats.org/drawingml/2006/main">
+            <a:r>
+              <a:t>人工定稿：</a:t>
+            </a:r>
+          </a:p>
+          <a:p xmlns:a="http://schemas.openxmlformats.org/drawingml/2006/main">
+            <a:r>
+              <a:t>&gt; 足以启动 SAE-vs-PCA baseline；不足以标记因果忠实为 stable。</a:t>
+            </a:r>
+          </a:p>
+          <a:p xmlns:a="http://schemas.openxmlformats.org/drawingml/2006/main">
+            <a:r>
+              <a:t/>
+            </a:r>
+          </a:p>
+          <a:p xmlns:a="http://schemas.openxmlformats.org/drawingml/2006/main">
+            <a:r>
+              <a:t>状态：verified-with-caveat → 综合判断 review</a:t>
+            </a:r>
+          </a:p>
+          <a:p xmlns:a="http://schemas.openxmlformats.org/drawingml/2006/main">
+            <a:r>
+              <a:t/>
+            </a:r>
+          </a:p>
+          <a:p xmlns:a="http://schemas.openxmlformats.org/drawingml/2006/main">
+            <a:r>
+              <a:t>教师讲述：</a:t>
+            </a:r>
+          </a:p>
+          <a:p xmlns:a="http://schemas.openxmlformats.org/drawingml/2006/main">
+            <a:r>
+              <a:t>演示同一条主张如何被三篇论文共同收窄。明确 C16/C31 的设置不同，因此承担方法论限制，不冒充同设置反驳。</a:t>
+            </a:r>
+          </a:p>
+          <a:p xmlns:a="http://schemas.openxmlformats.org/drawingml/2006/main">
+            <a:r>
+              <a:t/>
+            </a:r>
+          </a:p>
+          <a:p xmlns:a="http://schemas.openxmlformats.org/drawingml/2006/main">
+            <a:r>
+              <a:t>学生动作：</a:t>
+            </a:r>
+          </a:p>
+          <a:p xmlns:a="http://schemas.openxmlformats.org/drawingml/2006/main">
+            <a:r>
+              <a:t>请学生给出 L9 还需补的一项证据：重构敏感性、随机/监督方向、held-out 或正常路径证据。</a:t>
+            </a:r>
+          </a:p>
+          <a:p xmlns:a="http://schemas.openxmlformats.org/drawingml/2006/main">
+            <a:r>
+              <a:t/>
+            </a:r>
+          </a:p>
+          <a:p xmlns:a="http://schemas.openxmlformats.org/drawingml/2006/main">
+            <a:r>
+              <a:t>来源与边界：</a:t>
+            </a:r>
+          </a:p>
+          <a:p xmlns:a="http://schemas.openxmlformats.org/drawingml/2006/main">
+            <a:r>
+              <a:t>[mi-reading-card-demo.md](./mi-reading-card-demo.md)；MI-C02/C16/C31；[mi-case-registry.md](../../references/notes/mi-case-registry.md) MI-04-01–03。</a:t>
+            </a:r>
+          </a:p>
+          <a:p xmlns:a="http://schemas.openxmlformats.org/drawingml/2006/main">
+            <a:r>
+              <a:t/>
+            </a:r>
+          </a:p>
+          <a:p xmlns:a="http://schemas.openxmlformats.org/drawingml/2006/main">
+            <a:r>
+              <a:t>---</a:t>
+            </a:r>
+          </a:p>
+          <a:p xmlns:a="http://schemas.openxmlformats.org/drawingml/2006/main">
+            <a:r>
+              <a:t/>
             </a:r>
           </a:p>
           <a:p xmlns:a="http://schemas.openxmlformats.org/drawingml/2006/main">
@@ -755,7 +1430,17 @@
           </a:p>
           <a:p xmlns:a="http://schemas.openxmlformats.org/drawingml/2006/main">
             <a:r>
-              <a:t>- 本页仅使用课程内部规则与教学材料。</a:t>
+              <a:t/>
+            </a:r>
+          </a:p>
+          <a:p xmlns:a="http://schemas.openxmlformats.org/drawingml/2006/main">
+            <a:r>
+              <a:t>- 本课 handout.md 与 slides.md</a:t>
+            </a:r>
+          </a:p>
+          <a:p xmlns:a="http://schemas.openxmlformats.org/drawingml/2006/main">
+            <a:r>
+              <a:t/>
             </a:r>
           </a:p>
           <a:p xmlns:a="http://schemas.openxmlformats.org/drawingml/2006/main">
@@ -830,7 +1515,172 @@
           <a:lstStyle xmlns:a="http://schemas.openxmlformats.org/drawingml/2006/main"/>
           <a:p xmlns:a="http://schemas.openxmlformats.org/drawingml/2006/main">
             <a:r>
-              <a:t>页面标题：个人实践：跑通一次五步精读</a:t>
+              <a:t>页面：P14 个人实践：跑通一次五步精读</a:t>
+            </a:r>
+          </a:p>
+          <a:p xmlns:a="http://schemas.openxmlformats.org/drawingml/2006/main">
+            <a:r>
+              <a:t/>
+            </a:r>
+          </a:p>
+          <a:p xmlns:a="http://schemas.openxmlformats.org/drawingml/2006/main">
+            <a:r>
+              <a:t>讲义位置：本课讲义；见逐页母稿映射表</a:t>
+            </a:r>
+          </a:p>
+          <a:p xmlns:a="http://schemas.openxmlformats.org/drawingml/2006/main">
+            <a:r>
+              <a:t/>
+            </a:r>
+          </a:p>
+          <a:p xmlns:a="http://schemas.openxmlformats.org/drawingml/2006/main">
+            <a:r>
+              <a:t>屏显核对：</a:t>
+            </a:r>
+          </a:p>
+          <a:p xmlns:a="http://schemas.openxmlformats.org/drawingml/2006/main">
+            <a:r>
+              <a:t>本轮完成：</a:t>
+            </a:r>
+          </a:p>
+          <a:p xmlns:a="http://schemas.openxmlformats.org/drawingml/2006/main">
+            <a:r>
+              <a:t>1. 选一篇可访问原文的 verified / verified-with-caveat 论文（没有者使用 Keshav 演示包）</a:t>
+            </a:r>
+          </a:p>
+          <a:p xmlns:a="http://schemas.openxmlformats.org/drawingml/2006/main">
+            <a:r>
+              <a:t>2. AI 导航：中心问题/结构/术语/预期位置/待追问</a:t>
+            </a:r>
+          </a:p>
+          <a:p xmlns:a="http://schemas.openxmlformats.org/drawingml/2006/main">
+            <a:r>
+              <a:t>3. 原文核验：至少两个可复查位置</a:t>
+            </a:r>
+          </a:p>
+          <a:p xmlns:a="http://schemas.openxmlformats.org/drawingml/2006/main">
+            <a:r>
+              <a:t>4. AI 质疑：根据已核验内容提反例</a:t>
+            </a:r>
+          </a:p>
+          <a:p xmlns:a="http://schemas.openxmlformats.org/drawingml/2006/main">
+            <a:r>
+              <a:t>5. 偏差审计：AI 错误/遗漏，或已检查风险与依据</a:t>
+            </a:r>
+          </a:p>
+          <a:p xmlns:a="http://schemas.openxmlformats.org/drawingml/2006/main">
+            <a:r>
+              <a:t>6. 完整阅读卡：全字段有值；不适用项写理由</a:t>
+            </a:r>
+          </a:p>
+          <a:p xmlns:a="http://schemas.openxmlformats.org/drawingml/2006/main">
+            <a:r>
+              <a:t>7. 写一条 AI 使用记录</a:t>
+            </a:r>
+          </a:p>
+          <a:p xmlns:a="http://schemas.openxmlformats.org/drawingml/2006/main">
+            <a:r>
+              <a:t/>
+            </a:r>
+          </a:p>
+          <a:p xmlns:a="http://schemas.openxmlformats.org/drawingml/2006/main">
+            <a:r>
+              <a:t>选择顺序：自有已核验论文 → Keshav 真实演示包</a:t>
+            </a:r>
+          </a:p>
+          <a:p xmlns:a="http://schemas.openxmlformats.org/drawingml/2006/main">
+            <a:r>
+              <a:t/>
+            </a:r>
+          </a:p>
+          <a:p xmlns:a="http://schemas.openxmlformats.org/drawingml/2006/main">
+            <a:r>
+              <a:t>教师讲述：</a:t>
+            </a:r>
+          </a:p>
+          <a:p xmlns:a="http://schemas.openxmlformats.org/drawingml/2006/main">
+            <a:r>
+              <a:t>没有可访问原文的学生使用 Keshav 演示包，但要自己重新完成一条主张的定位、边界判断和偏差审计，不直接复制示例卡。</a:t>
+            </a:r>
+          </a:p>
+          <a:p xmlns:a="http://schemas.openxmlformats.org/drawingml/2006/main">
+            <a:r>
+              <a:t/>
+            </a:r>
+          </a:p>
+          <a:p xmlns:a="http://schemas.openxmlformats.org/drawingml/2006/main">
+            <a:r>
+              <a:t>验收标准：</a:t>
+            </a:r>
+          </a:p>
+          <a:p xmlns:a="http://schemas.openxmlformats.org/drawingml/2006/main">
+            <a:r>
+              <a:t>- 至少 1 张完整阅读卡，字段齐全；</a:t>
+            </a:r>
+          </a:p>
+          <a:p xmlns:a="http://schemas.openxmlformats.org/drawingml/2006/main">
+            <a:r>
+              <a:t>- 每条作者主张标注原文位置；</a:t>
+            </a:r>
+          </a:p>
+          <a:p xmlns:a="http://schemas.openxmlformats.org/drawingml/2006/main">
+            <a:r>
+              <a:t>- 偏差审计记录 AI 错误/遗漏，或已检查风险与依据；</a:t>
+            </a:r>
+          </a:p>
+          <a:p xmlns:a="http://schemas.openxmlformats.org/drawingml/2006/main">
+            <a:r>
+              <a:t>- 原文证据写明指标/对照/样本/限定；</a:t>
+            </a:r>
+          </a:p>
+          <a:p xmlns:a="http://schemas.openxmlformats.org/drawingml/2006/main">
+            <a:r>
+              <a:t>- AI 使用记录完整。</a:t>
+            </a:r>
+          </a:p>
+          <a:p xmlns:a="http://schemas.openxmlformats.org/drawingml/2006/main">
+            <a:r>
+              <a:t/>
+            </a:r>
+          </a:p>
+          <a:p xmlns:a="http://schemas.openxmlformats.org/drawingml/2006/main">
+            <a:r>
+              <a:t>学生动作：</a:t>
+            </a:r>
+          </a:p>
+          <a:p xmlns:a="http://schemas.openxmlformats.org/drawingml/2006/main">
+            <a:r>
+              <a:t>说明任务后切换至 P15 模板停留页。教师巡视只处理共同卡点，不逐台排障。模型不可用者使用纸面或 Markdown 模板完成。</a:t>
+            </a:r>
+          </a:p>
+          <a:p xmlns:a="http://schemas.openxmlformats.org/drawingml/2006/main">
+            <a:r>
+              <a:t/>
+            </a:r>
+          </a:p>
+          <a:p xmlns:a="http://schemas.openxmlformats.org/drawingml/2006/main">
+            <a:r>
+              <a:t>来源与边界：</a:t>
+            </a:r>
+          </a:p>
+          <a:p xmlns:a="http://schemas.openxmlformats.org/drawingml/2006/main">
+            <a:r>
+              <a:t>[starter-template.md](../../course/starter-template.md) 最小文件结构；第 3 课候选文献表。</a:t>
+            </a:r>
+          </a:p>
+          <a:p xmlns:a="http://schemas.openxmlformats.org/drawingml/2006/main">
+            <a:r>
+              <a:t/>
+            </a:r>
+          </a:p>
+          <a:p xmlns:a="http://schemas.openxmlformats.org/drawingml/2006/main">
+            <a:r>
+              <a:t>---</a:t>
+            </a:r>
+          </a:p>
+          <a:p xmlns:a="http://schemas.openxmlformats.org/drawingml/2006/main">
+            <a:r>
+              <a:t/>
             </a:r>
           </a:p>
           <a:p xmlns:a="http://schemas.openxmlformats.org/drawingml/2006/main">
@@ -840,7 +1690,17 @@
           </a:p>
           <a:p xmlns:a="http://schemas.openxmlformats.org/drawingml/2006/main">
             <a:r>
-              <a:t>- 本页仅使用课程内部规则与教学材料。</a:t>
+              <a:t/>
+            </a:r>
+          </a:p>
+          <a:p xmlns:a="http://schemas.openxmlformats.org/drawingml/2006/main">
+            <a:r>
+              <a:t>- 本课 handout.md 与 slides.md</a:t>
+            </a:r>
+          </a:p>
+          <a:p xmlns:a="http://schemas.openxmlformats.org/drawingml/2006/main">
+            <a:r>
+              <a:t/>
             </a:r>
           </a:p>
           <a:p xmlns:a="http://schemas.openxmlformats.org/drawingml/2006/main">
@@ -915,7 +1775,227 @@
           <a:lstStyle xmlns:a="http://schemas.openxmlformats.org/drawingml/2006/main"/>
           <a:p xmlns:a="http://schemas.openxmlformats.org/drawingml/2006/main">
             <a:r>
-              <a:t>页面标题：实践停留页：模板</a:t>
+              <a:t>页面：P15 实践停留页：模板</a:t>
+            </a:r>
+          </a:p>
+          <a:p xmlns:a="http://schemas.openxmlformats.org/drawingml/2006/main">
+            <a:r>
+              <a:t/>
+            </a:r>
+          </a:p>
+          <a:p xmlns:a="http://schemas.openxmlformats.org/drawingml/2006/main">
+            <a:r>
+              <a:t>讲义位置：本课讲义；见逐页母稿映射表</a:t>
+            </a:r>
+          </a:p>
+          <a:p xmlns:a="http://schemas.openxmlformats.org/drawingml/2006/main">
+            <a:r>
+              <a:t/>
+            </a:r>
+          </a:p>
+          <a:p xmlns:a="http://schemas.openxmlformats.org/drawingml/2006/main">
+            <a:r>
+              <a:t>屏显核对：</a:t>
+            </a:r>
+          </a:p>
+          <a:p xmlns:a="http://schemas.openxmlformats.org/drawingml/2006/main">
+            <a:r>
+              <a:t>阅读卡模板：</a:t>
+            </a:r>
+          </a:p>
+          <a:p xmlns:a="http://schemas.openxmlformats.org/drawingml/2006/main">
+            <a:r>
+              <a:t/>
+            </a:r>
+          </a:p>
+          <a:p xmlns:a="http://schemas.openxmlformats.org/drawingml/2006/main">
+            <a:r>
+              <a:t>```text</a:t>
+            </a:r>
+          </a:p>
+          <a:p xmlns:a="http://schemas.openxmlformats.org/drawingml/2006/main">
+            <a:r>
+              <a:t>论文：题名 / 作者 / 年份 / DOI</a:t>
+            </a:r>
+          </a:p>
+          <a:p xmlns:a="http://schemas.openxmlformats.org/drawingml/2006/main">
+            <a:r>
+              <a:t>来源状态：</a:t>
+            </a:r>
+          </a:p>
+          <a:p xmlns:a="http://schemas.openxmlformats.org/drawingml/2006/main">
+            <a:r>
+              <a:t>证据角色：主证据 / 补充 / 对比 / 探索线索</a:t>
+            </a:r>
+          </a:p>
+          <a:p xmlns:a="http://schemas.openxmlformats.org/drawingml/2006/main">
+            <a:r>
+              <a:t>中心问题（一句话，核验后）：</a:t>
+            </a:r>
+          </a:p>
+          <a:p xmlns:a="http://schemas.openxmlformats.org/drawingml/2006/main">
+            <a:r>
+              <a:t>作者主张（带位置）：</a:t>
+            </a:r>
+          </a:p>
+          <a:p xmlns:a="http://schemas.openxmlformats.org/drawingml/2006/main">
+            <a:r>
+              <a:t>  - 主张 1 → §x.x, p.x, Fig.x</a:t>
+            </a:r>
+          </a:p>
+          <a:p xmlns:a="http://schemas.openxmlformats.org/drawingml/2006/main">
+            <a:r>
+              <a:t>原文证据：</a:t>
+            </a:r>
+          </a:p>
+          <a:p xmlns:a="http://schemas.openxmlformats.org/drawingml/2006/main">
+            <a:r>
+              <a:t>  指标：　对照：　样本：　限定：</a:t>
+            </a:r>
+          </a:p>
+          <a:p xmlns:a="http://schemas.openxmlformats.org/drawingml/2006/main">
+            <a:r>
+              <a:t>局限与边界：</a:t>
+            </a:r>
+          </a:p>
+          <a:p xmlns:a="http://schemas.openxmlformats.org/drawingml/2006/main">
+            <a:r>
+              <a:t>  作者自述：　个人判断：</a:t>
+            </a:r>
+          </a:p>
+          <a:p xmlns:a="http://schemas.openxmlformats.org/drawingml/2006/main">
+            <a:r>
+              <a:t>个人判断：</a:t>
+            </a:r>
+          </a:p>
+          <a:p xmlns:a="http://schemas.openxmlformats.org/drawingml/2006/main">
+            <a:r>
+              <a:t>AI 建议（待核验）：</a:t>
+            </a:r>
+          </a:p>
+          <a:p xmlns:a="http://schemas.openxmlformats.org/drawingml/2006/main">
+            <a:r>
+              <a:t>AI 偏差审计（错误/遗漏，或已检查风险与依据）：</a:t>
+            </a:r>
+          </a:p>
+          <a:p xmlns:a="http://schemas.openxmlformats.org/drawingml/2006/main">
+            <a:r>
+              <a:t>内容状态：</a:t>
+            </a:r>
+          </a:p>
+          <a:p xmlns:a="http://schemas.openxmlformats.org/drawingml/2006/main">
+            <a:r>
+              <a:t>```</a:t>
+            </a:r>
+          </a:p>
+          <a:p xmlns:a="http://schemas.openxmlformats.org/drawingml/2006/main">
+            <a:r>
+              <a:t/>
+            </a:r>
+          </a:p>
+          <a:p xmlns:a="http://schemas.openxmlformats.org/drawingml/2006/main">
+            <a:r>
+              <a:t>偏差审计表模板：</a:t>
+            </a:r>
+          </a:p>
+          <a:p xmlns:a="http://schemas.openxmlformats.org/drawingml/2006/main">
+            <a:r>
+              <a:t/>
+            </a:r>
+          </a:p>
+          <a:p xmlns:a="http://schemas.openxmlformats.org/drawingml/2006/main">
+            <a:r>
+              <a:t>```text</a:t>
+            </a:r>
+          </a:p>
+          <a:p xmlns:a="http://schemas.openxmlformats.org/drawingml/2006/main">
+            <a:r>
+              <a:t>| AI 输出 | 偏差类型 | 原文实际 | 核验位置 | 处理 |</a:t>
+            </a:r>
+          </a:p>
+          <a:p xmlns:a="http://schemas.openxmlformats.org/drawingml/2006/main">
+            <a:r>
+              <a:t>```</a:t>
+            </a:r>
+          </a:p>
+          <a:p xmlns:a="http://schemas.openxmlformats.org/drawingml/2006/main">
+            <a:r>
+              <a:t/>
+            </a:r>
+          </a:p>
+          <a:p xmlns:a="http://schemas.openxmlformats.org/drawingml/2006/main">
+            <a:r>
+              <a:t>写入位置：reading-cards.md</a:t>
+            </a:r>
+          </a:p>
+          <a:p xmlns:a="http://schemas.openxmlformats.org/drawingml/2006/main">
+            <a:r>
+              <a:t/>
+            </a:r>
+          </a:p>
+          <a:p xmlns:a="http://schemas.openxmlformats.org/drawingml/2006/main">
+            <a:r>
+              <a:t>完整 = 每个字段有值，或写明“不适用 + 理由”</a:t>
+            </a:r>
+          </a:p>
+          <a:p xmlns:a="http://schemas.openxmlformats.org/drawingml/2006/main">
+            <a:r>
+              <a:t/>
+            </a:r>
+          </a:p>
+          <a:p xmlns:a="http://schemas.openxmlformats.org/drawingml/2006/main">
+            <a:r>
+              <a:t>教师讲述：</a:t>
+            </a:r>
+          </a:p>
+          <a:p xmlns:a="http://schemas.openxmlformats.org/drawingml/2006/main">
+            <a:r>
+              <a:t>模板投屏停留。课堂至少完成 1 张围绕 1 条关键主张的全字段阅读卡；本课不正式提交，第 6 课问题门前累计至少 3 张。断网/无模型时使用 `reading-card-demo.md` 的真实原文 trace，并在日志中写明未执行实时模型。</a:t>
+            </a:r>
+          </a:p>
+          <a:p xmlns:a="http://schemas.openxmlformats.org/drawingml/2006/main">
+            <a:r>
+              <a:t/>
+            </a:r>
+          </a:p>
+          <a:p xmlns:a="http://schemas.openxmlformats.org/drawingml/2006/main">
+            <a:r>
+              <a:t>学生动作：</a:t>
+            </a:r>
+          </a:p>
+          <a:p xmlns:a="http://schemas.openxmlformats.org/drawingml/2006/main">
+            <a:r>
+              <a:t>第一段完成主张定位与证据限定；教师插入“作者主张、AI 转述和个人判断”分层点评；第二段补全边界、偏差审计和 AI 使用记录。</a:t>
+            </a:r>
+          </a:p>
+          <a:p xmlns:a="http://schemas.openxmlformats.org/drawingml/2006/main">
+            <a:r>
+              <a:t/>
+            </a:r>
+          </a:p>
+          <a:p xmlns:a="http://schemas.openxmlformats.org/drawingml/2006/main">
+            <a:r>
+              <a:t>来源与边界：</a:t>
+            </a:r>
+          </a:p>
+          <a:p xmlns:a="http://schemas.openxmlformats.org/drawingml/2006/main">
+            <a:r>
+              <a:t>讲义 §四 阅读卡字段；§二·4 偏差审计表。</a:t>
+            </a:r>
+          </a:p>
+          <a:p xmlns:a="http://schemas.openxmlformats.org/drawingml/2006/main">
+            <a:r>
+              <a:t/>
+            </a:r>
+          </a:p>
+          <a:p xmlns:a="http://schemas.openxmlformats.org/drawingml/2006/main">
+            <a:r>
+              <a:t>---</a:t>
+            </a:r>
+          </a:p>
+          <a:p xmlns:a="http://schemas.openxmlformats.org/drawingml/2006/main">
+            <a:r>
+              <a:t/>
             </a:r>
           </a:p>
           <a:p xmlns:a="http://schemas.openxmlformats.org/drawingml/2006/main">
@@ -925,7 +2005,17 @@
           </a:p>
           <a:p xmlns:a="http://schemas.openxmlformats.org/drawingml/2006/main">
             <a:r>
-              <a:t>- 本页仅使用课程内部规则与教学材料。</a:t>
+              <a:t/>
+            </a:r>
+          </a:p>
+          <a:p xmlns:a="http://schemas.openxmlformats.org/drawingml/2006/main">
+            <a:r>
+              <a:t>- 本课 handout.md 与 slides.md</a:t>
+            </a:r>
+          </a:p>
+          <a:p xmlns:a="http://schemas.openxmlformats.org/drawingml/2006/main">
+            <a:r>
+              <a:t/>
             </a:r>
           </a:p>
           <a:p xmlns:a="http://schemas.openxmlformats.org/drawingml/2006/main">
@@ -1000,7 +2090,127 @@
           <a:lstStyle xmlns:a="http://schemas.openxmlformats.org/drawingml/2006/main"/>
           <a:p xmlns:a="http://schemas.openxmlformats.org/drawingml/2006/main">
             <a:r>
-              <a:t>页面标题：同伴互查三问</a:t>
+              <a:t>页面：P16 同伴互查三问</a:t>
+            </a:r>
+          </a:p>
+          <a:p xmlns:a="http://schemas.openxmlformats.org/drawingml/2006/main">
+            <a:r>
+              <a:t/>
+            </a:r>
+          </a:p>
+          <a:p xmlns:a="http://schemas.openxmlformats.org/drawingml/2006/main">
+            <a:r>
+              <a:t>讲义位置：本课讲义；见逐页母稿映射表</a:t>
+            </a:r>
+          </a:p>
+          <a:p xmlns:a="http://schemas.openxmlformats.org/drawingml/2006/main">
+            <a:r>
+              <a:t/>
+            </a:r>
+          </a:p>
+          <a:p xmlns:a="http://schemas.openxmlformats.org/drawingml/2006/main">
+            <a:r>
+              <a:t>屏显核对：</a:t>
+            </a:r>
+          </a:p>
+          <a:p xmlns:a="http://schemas.openxmlformats.org/drawingml/2006/main">
+            <a:r>
+              <a:t>两人互查三问：</a:t>
+            </a:r>
+          </a:p>
+          <a:p xmlns:a="http://schemas.openxmlformats.org/drawingml/2006/main">
+            <a:r>
+              <a:t>1. 主张有位置吗？每条作者主张标注了章节/页码/图表吗？</a:t>
+            </a:r>
+          </a:p>
+          <a:p xmlns:a="http://schemas.openxmlformats.org/drawingml/2006/main">
+            <a:r>
+              <a:t>2. AI 与原文分栏了吗？作者主张和个人判断没有混在一起吗？</a:t>
+            </a:r>
+          </a:p>
+          <a:p xmlns:a="http://schemas.openxmlformats.org/drawingml/2006/main">
+            <a:r>
+              <a:t>3. 偏差审计可复查吗？有 AI 错误/遗漏，或已检查风险与核验依据吗？</a:t>
+            </a:r>
+          </a:p>
+          <a:p xmlns:a="http://schemas.openxmlformats.org/drawingml/2006/main">
+            <a:r>
+              <a:t/>
+            </a:r>
+          </a:p>
+          <a:p xmlns:a="http://schemas.openxmlformats.org/drawingml/2006/main">
+            <a:r>
+              <a:t>作者记录：采纳／暂不采纳／待核验</a:t>
+            </a:r>
+          </a:p>
+          <a:p xmlns:a="http://schemas.openxmlformats.org/drawingml/2006/main">
+            <a:r>
+              <a:t/>
+            </a:r>
+          </a:p>
+          <a:p xmlns:a="http://schemas.openxmlformats.org/drawingml/2006/main">
+            <a:r>
+              <a:t>&gt; 同伴只提问题，不替作者决定。</a:t>
+            </a:r>
+          </a:p>
+          <a:p xmlns:a="http://schemas.openxmlformats.org/drawingml/2006/main">
+            <a:r>
+              <a:t/>
+            </a:r>
+          </a:p>
+          <a:p xmlns:a="http://schemas.openxmlformats.org/drawingml/2006/main">
+            <a:r>
+              <a:t>教师讲述：</a:t>
+            </a:r>
+          </a:p>
+          <a:p xmlns:a="http://schemas.openxmlformats.org/drawingml/2006/main">
+            <a:r>
+              <a:t>每人约 3-5 分钟：一人用 45 秒说明论文、一条带位置主张，以及一处 AI 错误/遗漏或已检查风险；同伴按三问反馈；作者记录处理决定。反馈不要求立即改写。反馈者不替代作者修改，不形成共同提交。人数为奇数时组成三人组，每人缩短说明时间。</a:t>
+            </a:r>
+          </a:p>
+          <a:p xmlns:a="http://schemas.openxmlformats.org/drawingml/2006/main">
+            <a:r>
+              <a:t/>
+            </a:r>
+          </a:p>
+          <a:p xmlns:a="http://schemas.openxmlformats.org/drawingml/2006/main">
+            <a:r>
+              <a:t>学生动作：</a:t>
+            </a:r>
+          </a:p>
+          <a:p xmlns:a="http://schemas.openxmlformats.org/drawingml/2006/main">
+            <a:r>
+              <a:t>两人互查。</a:t>
+            </a:r>
+          </a:p>
+          <a:p xmlns:a="http://schemas.openxmlformats.org/drawingml/2006/main">
+            <a:r>
+              <a:t/>
+            </a:r>
+          </a:p>
+          <a:p xmlns:a="http://schemas.openxmlformats.org/drawingml/2006/main">
+            <a:r>
+              <a:t>来源与边界：</a:t>
+            </a:r>
+          </a:p>
+          <a:p xmlns:a="http://schemas.openxmlformats.org/drawingml/2006/main">
+            <a:r>
+              <a:t>同伴反馈为形成性活动，不单独计分，不共同提交（[assignments.md](../../course/assignments.md)）。</a:t>
+            </a:r>
+          </a:p>
+          <a:p xmlns:a="http://schemas.openxmlformats.org/drawingml/2006/main">
+            <a:r>
+              <a:t/>
+            </a:r>
+          </a:p>
+          <a:p xmlns:a="http://schemas.openxmlformats.org/drawingml/2006/main">
+            <a:r>
+              <a:t>---</a:t>
+            </a:r>
+          </a:p>
+          <a:p xmlns:a="http://schemas.openxmlformats.org/drawingml/2006/main">
+            <a:r>
+              <a:t/>
             </a:r>
           </a:p>
           <a:p xmlns:a="http://schemas.openxmlformats.org/drawingml/2006/main">
@@ -1010,7 +2220,17 @@
           </a:p>
           <a:p xmlns:a="http://schemas.openxmlformats.org/drawingml/2006/main">
             <a:r>
-              <a:t>- 本页仅使用课程内部规则与教学材料。</a:t>
+              <a:t/>
+            </a:r>
+          </a:p>
+          <a:p xmlns:a="http://schemas.openxmlformats.org/drawingml/2006/main">
+            <a:r>
+              <a:t>- 本课 handout.md 与 slides.md</a:t>
+            </a:r>
+          </a:p>
+          <a:p xmlns:a="http://schemas.openxmlformats.org/drawingml/2006/main">
+            <a:r>
+              <a:t/>
             </a:r>
           </a:p>
           <a:p xmlns:a="http://schemas.openxmlformats.org/drawingml/2006/main">
@@ -1085,7 +2305,127 @@
           <a:lstStyle xmlns:a="http://schemas.openxmlformats.org/drawingml/2006/main"/>
           <a:p xmlns:a="http://schemas.openxmlformats.org/drawingml/2006/main">
             <a:r>
-              <a:t>页面标题：本讲知识点总结</a:t>
+              <a:t>页面：P17 本讲知识点总结</a:t>
+            </a:r>
+          </a:p>
+          <a:p xmlns:a="http://schemas.openxmlformats.org/drawingml/2006/main">
+            <a:r>
+              <a:t/>
+            </a:r>
+          </a:p>
+          <a:p xmlns:a="http://schemas.openxmlformats.org/drawingml/2006/main">
+            <a:r>
+              <a:t>讲义位置：本课讲义；见逐页母稿映射表</a:t>
+            </a:r>
+          </a:p>
+          <a:p xmlns:a="http://schemas.openxmlformats.org/drawingml/2006/main">
+            <a:r>
+              <a:t/>
+            </a:r>
+          </a:p>
+          <a:p xmlns:a="http://schemas.openxmlformats.org/drawingml/2006/main">
+            <a:r>
+              <a:t>屏显核对：</a:t>
+            </a:r>
+          </a:p>
+          <a:p xmlns:a="http://schemas.openxmlformats.org/drawingml/2006/main">
+            <a:r>
+              <a:t>AI 导航 → 原文核验 → 偏差审计 → 人工定稿</a:t>
+            </a:r>
+          </a:p>
+          <a:p xmlns:a="http://schemas.openxmlformats.org/drawingml/2006/main">
+            <a:r>
+              <a:t/>
+            </a:r>
+          </a:p>
+          <a:p xmlns:a="http://schemas.openxmlformats.org/drawingml/2006/main">
+            <a:r>
+              <a:t>1. **AI 导航**：先定位任务、设置与关键位置。</a:t>
+            </a:r>
+          </a:p>
+          <a:p xmlns:a="http://schemas.openxmlformats.org/drawingml/2006/main">
+            <a:r>
+              <a:t>2. **原文核验**：逐条检查指标、对照与限定。</a:t>
+            </a:r>
+          </a:p>
+          <a:p xmlns:a="http://schemas.openxmlformats.org/drawingml/2006/main">
+            <a:r>
+              <a:t>3. **偏差审计**：记录错读、遗漏，或已检查风险及依据。</a:t>
+            </a:r>
+          </a:p>
+          <a:p xmlns:a="http://schemas.openxmlformats.org/drawingml/2006/main">
+            <a:r>
+              <a:t>4. **人工定稿**：保留原文位置与判断边界。</a:t>
+            </a:r>
+          </a:p>
+          <a:p xmlns:a="http://schemas.openxmlformats.org/drawingml/2006/main">
+            <a:r>
+              <a:t/>
+            </a:r>
+          </a:p>
+          <a:p xmlns:a="http://schemas.openxmlformats.org/drawingml/2006/main">
+            <a:r>
+              <a:t>&gt; 关键边界：AI 输出只提供阅读线索；关键主张必须绑定原文位置，并由研究者作最终判断。</a:t>
+            </a:r>
+          </a:p>
+          <a:p xmlns:a="http://schemas.openxmlformats.org/drawingml/2006/main">
+            <a:r>
+              <a:t/>
+            </a:r>
+          </a:p>
+          <a:p xmlns:a="http://schemas.openxmlformats.org/drawingml/2006/main">
+            <a:r>
+              <a:t>教师讲述：</a:t>
+            </a:r>
+          </a:p>
+          <a:p xmlns:a="http://schemas.openxmlformats.org/drawingml/2006/main">
+            <a:r>
+              <a:t>用四步主链回收本讲，不逐页复述。强调阅读卡的价值不在“摘要更完整”，而在原文位置、作者主张、AI 偏差和人工判断能够相互追踪。本页不引入新任务。</a:t>
+            </a:r>
+          </a:p>
+          <a:p xmlns:a="http://schemas.openxmlformats.org/drawingml/2006/main">
+            <a:r>
+              <a:t/>
+            </a:r>
+          </a:p>
+          <a:p xmlns:a="http://schemas.openxmlformats.org/drawingml/2006/main">
+            <a:r>
+              <a:t>学生动作：</a:t>
+            </a:r>
+          </a:p>
+          <a:p xmlns:a="http://schemas.openxmlformats.org/drawingml/2006/main">
+            <a:r>
+              <a:t>学生用一句话指出自己阅读卡目前停在哪一步。</a:t>
+            </a:r>
+          </a:p>
+          <a:p xmlns:a="http://schemas.openxmlformats.org/drawingml/2006/main">
+            <a:r>
+              <a:t/>
+            </a:r>
+          </a:p>
+          <a:p xmlns:a="http://schemas.openxmlformats.org/drawingml/2006/main">
+            <a:r>
+              <a:t>来源与边界：</a:t>
+            </a:r>
+          </a:p>
+          <a:p xmlns:a="http://schemas.openxmlformats.org/drawingml/2006/main">
+            <a:r>
+              <a:t>讲义 §二 五步流程、§三 主张核验与偏差审计；[AGENTS.md](../../AGENTS.md) 证据标准。</a:t>
+            </a:r>
+          </a:p>
+          <a:p xmlns:a="http://schemas.openxmlformats.org/drawingml/2006/main">
+            <a:r>
+              <a:t/>
+            </a:r>
+          </a:p>
+          <a:p xmlns:a="http://schemas.openxmlformats.org/drawingml/2006/main">
+            <a:r>
+              <a:t>---</a:t>
+            </a:r>
+          </a:p>
+          <a:p xmlns:a="http://schemas.openxmlformats.org/drawingml/2006/main">
+            <a:r>
+              <a:t/>
             </a:r>
           </a:p>
           <a:p xmlns:a="http://schemas.openxmlformats.org/drawingml/2006/main">
@@ -1095,7 +2435,17 @@
           </a:p>
           <a:p xmlns:a="http://schemas.openxmlformats.org/drawingml/2006/main">
             <a:r>
-              <a:t>- 本页仅使用课程内部规则与教学材料。</a:t>
+              <a:t/>
+            </a:r>
+          </a:p>
+          <a:p xmlns:a="http://schemas.openxmlformats.org/drawingml/2006/main">
+            <a:r>
+              <a:t>- 本课 handout.md 与 slides.md</a:t>
+            </a:r>
+          </a:p>
+          <a:p xmlns:a="http://schemas.openxmlformats.org/drawingml/2006/main">
+            <a:r>
+              <a:t/>
             </a:r>
           </a:p>
           <a:p xmlns:a="http://schemas.openxmlformats.org/drawingml/2006/main">
@@ -1170,7 +2520,172 @@
           <a:lstStyle xmlns:a="http://schemas.openxmlformats.org/drawingml/2006/main"/>
           <a:p xmlns:a="http://schemas.openxmlformats.org/drawingml/2006/main">
             <a:r>
-              <a:t>页面标题：退出卡与第 5 课预告</a:t>
+              <a:t>页面：P18 退出卡与第 5 课预告</a:t>
+            </a:r>
+          </a:p>
+          <a:p xmlns:a="http://schemas.openxmlformats.org/drawingml/2006/main">
+            <a:r>
+              <a:t/>
+            </a:r>
+          </a:p>
+          <a:p xmlns:a="http://schemas.openxmlformats.org/drawingml/2006/main">
+            <a:r>
+              <a:t>讲义位置：本课讲义；见逐页母稿映射表</a:t>
+            </a:r>
+          </a:p>
+          <a:p xmlns:a="http://schemas.openxmlformats.org/drawingml/2006/main">
+            <a:r>
+              <a:t/>
+            </a:r>
+          </a:p>
+          <a:p xmlns:a="http://schemas.openxmlformats.org/drawingml/2006/main">
+            <a:r>
+              <a:t>屏显核对：</a:t>
+            </a:r>
+          </a:p>
+          <a:p xmlns:a="http://schemas.openxmlformats.org/drawingml/2006/main">
+            <a:r>
+              <a:t>退出卡：</a:t>
+            </a:r>
+          </a:p>
+          <a:p xmlns:a="http://schemas.openxmlformats.org/drawingml/2006/main">
+            <a:r>
+              <a:t>- 今天最清楚的一点；</a:t>
+            </a:r>
+          </a:p>
+          <a:p xmlns:a="http://schemas.openxmlformats.org/drawingml/2006/main">
+            <a:r>
+              <a:t>- 仍然困惑的一点；</a:t>
+            </a:r>
+          </a:p>
+          <a:p xmlns:a="http://schemas.openxmlformats.org/drawingml/2006/main">
+            <a:r>
+              <a:t>- 阅读卡当前字段是否齐全；</a:t>
+            </a:r>
+          </a:p>
+          <a:p xmlns:a="http://schemas.openxmlformats.org/drawingml/2006/main">
+            <a:r>
+              <a:t>- 偏差审计记录了什么错误/遗漏或已检查风险；</a:t>
+            </a:r>
+          </a:p>
+          <a:p xmlns:a="http://schemas.openxmlformats.org/drawingml/2006/main">
+            <a:r>
+              <a:t>- 第 5 课需要补的证据地图或空白案例。</a:t>
+            </a:r>
+          </a:p>
+          <a:p xmlns:a="http://schemas.openxmlformats.org/drawingml/2006/main">
+            <a:r>
+              <a:t/>
+            </a:r>
+          </a:p>
+          <a:p xmlns:a="http://schemas.openxmlformats.org/drawingml/2006/main">
+            <a:r>
+              <a:t>第 5 课预告：综述结构、证据地图与研究空白</a:t>
+            </a:r>
+          </a:p>
+          <a:p xmlns:a="http://schemas.openxmlformats.org/drawingml/2006/main">
+            <a:r>
+              <a:t/>
+            </a:r>
+          </a:p>
+          <a:p xmlns:a="http://schemas.openxmlformats.org/drawingml/2006/main">
+            <a:r>
+              <a:t>&gt; 不新增课后正式作业；第 6 课问题门前累计至少 3 张完整精读卡。</a:t>
+            </a:r>
+          </a:p>
+          <a:p xmlns:a="http://schemas.openxmlformats.org/drawingml/2006/main">
+            <a:r>
+              <a:t/>
+            </a:r>
+          </a:p>
+          <a:p xmlns:a="http://schemas.openxmlformats.org/drawingml/2006/main">
+            <a:r>
+              <a:t>教师讲述：</a:t>
+            </a:r>
+          </a:p>
+          <a:p xmlns:a="http://schemas.openxmlformats.org/drawingml/2006/main">
+            <a:r>
+              <a:t>回扣本课目标：学生不需要在 90 分钟内读完整篇论文。课堂至少完成 1 张完整阅读卡、一条偏差审计记录和一条 AI 使用记录，就形成可继续检查的起点。</a:t>
+            </a:r>
+          </a:p>
+          <a:p xmlns:a="http://schemas.openxmlformats.org/drawingml/2006/main">
+            <a:r>
+              <a:t/>
+            </a:r>
+          </a:p>
+          <a:p xmlns:a="http://schemas.openxmlformats.org/drawingml/2006/main">
+            <a:r>
+              <a:t>课后引导阅读（采用 AI 导航→原文核验→AI 质疑→偏差审计→人工定稿流程）：</a:t>
+            </a:r>
+          </a:p>
+          <a:p xmlns:a="http://schemas.openxmlformats.org/drawingml/2006/main">
+            <a:r>
+              <a:t>- Keshav "How to Read a Paper"，约 20 分钟，核心阅读；</a:t>
+            </a:r>
+          </a:p>
+          <a:p xmlns:a="http://schemas.openxmlformats.org/drawingml/2006/main">
+            <a:r>
+              <a:t>- Booth et al. *The Craft of Research*, 5th ed., Chapter 4，任选，约 25 分钟；</a:t>
+            </a:r>
+          </a:p>
+          <a:p xmlns:a="http://schemas.openxmlformats.org/drawingml/2006/main">
+            <a:r>
+              <a:t>- 沈向洋、华刚中文检查表，任选，约 15 分钟。</a:t>
+            </a:r>
+          </a:p>
+          <a:p xmlns:a="http://schemas.openxmlformats.org/drawingml/2006/main">
+            <a:r>
+              <a:t/>
+            </a:r>
+          </a:p>
+          <a:p xmlns:a="http://schemas.openxmlformats.org/drawingml/2006/main">
+            <a:r>
+              <a:t>项目推进：继续完善课堂阅读卡，并在第 6 课问题门前累计至少 3 张与个人项目直接相关的完整精读卡；若课堂已完成 1 张，通常还需补 2 张，每张约 30-45 分钟。持续写入 `reading-cards.md`，第 5 课再重组进证据地图，不逐周正式提交。</a:t>
+            </a:r>
+          </a:p>
+          <a:p xmlns:a="http://schemas.openxmlformats.org/drawingml/2006/main">
+            <a:r>
+              <a:t/>
+            </a:r>
+          </a:p>
+          <a:p xmlns:a="http://schemas.openxmlformats.org/drawingml/2006/main">
+            <a:r>
+              <a:t>学生动作：</a:t>
+            </a:r>
+          </a:p>
+          <a:p xmlns:a="http://schemas.openxmlformats.org/drawingml/2006/main">
+            <a:r>
+              <a:t>学生提交退出卡或保存在个人项目。教师收集共性问题，用于第 5 课前调整。</a:t>
+            </a:r>
+          </a:p>
+          <a:p xmlns:a="http://schemas.openxmlformats.org/drawingml/2006/main">
+            <a:r>
+              <a:t/>
+            </a:r>
+          </a:p>
+          <a:p xmlns:a="http://schemas.openxmlformats.org/drawingml/2006/main">
+            <a:r>
+              <a:t>来源与边界：</a:t>
+            </a:r>
+          </a:p>
+          <a:p xmlns:a="http://schemas.openxmlformats.org/drawingml/2006/main">
+            <a:r>
+              <a:t>- Keshav, S. *ACM SIGCOMM CCR* 37(3), 83–84 (2007). DOI: [10.1145/1273445.1273458](https://doi.org/10.1145/1273445.1273458)。</a:t>
+            </a:r>
+          </a:p>
+          <a:p xmlns:a="http://schemas.openxmlformats.org/drawingml/2006/main">
+            <a:r>
+              <a:t>- Booth et al. *The Craft of Research*, 5th ed. [出版社页面](https://press.uchicago.edu/ucp/books/book/chicago/C/bo215874008)。</a:t>
+            </a:r>
+          </a:p>
+          <a:p xmlns:a="http://schemas.openxmlformats.org/drawingml/2006/main">
+            <a:r>
+              <a:t>- 阅读规则见 [reading-list.md](../../course/reading-list.md)。</a:t>
+            </a:r>
+          </a:p>
+          <a:p xmlns:a="http://schemas.openxmlformats.org/drawingml/2006/main">
+            <a:r>
+              <a:t/>
             </a:r>
           </a:p>
           <a:p xmlns:a="http://schemas.openxmlformats.org/drawingml/2006/main">
@@ -1180,7 +2695,17 @@
           </a:p>
           <a:p xmlns:a="http://schemas.openxmlformats.org/drawingml/2006/main">
             <a:r>
-              <a:t>- 本页仅使用课程内部规则与教学材料。</a:t>
+              <a:t/>
+            </a:r>
+          </a:p>
+          <a:p xmlns:a="http://schemas.openxmlformats.org/drawingml/2006/main">
+            <a:r>
+              <a:t>- 本课 handout.md 与 slides.md</a:t>
+            </a:r>
+          </a:p>
+          <a:p xmlns:a="http://schemas.openxmlformats.org/drawingml/2006/main">
+            <a:r>
+              <a:t/>
             </a:r>
           </a:p>
           <a:p xmlns:a="http://schemas.openxmlformats.org/drawingml/2006/main">
@@ -1255,7 +2780,197 @@
           <a:lstStyle xmlns:a="http://schemas.openxmlformats.org/drawingml/2006/main"/>
           <a:p xmlns:a="http://schemas.openxmlformats.org/drawingml/2006/main">
             <a:r>
-              <a:t>页面标题：第 3 课之后，入口核验还不是完整精读</a:t>
+              <a:t>页面：P02 第 3 课之后，入口核验还不是完整精读</a:t>
+            </a:r>
+          </a:p>
+          <a:p xmlns:a="http://schemas.openxmlformats.org/drawingml/2006/main">
+            <a:r>
+              <a:t/>
+            </a:r>
+          </a:p>
+          <a:p xmlns:a="http://schemas.openxmlformats.org/drawingml/2006/main">
+            <a:r>
+              <a:t>讲义位置：本课讲义；见逐页母稿映射表</a:t>
+            </a:r>
+          </a:p>
+          <a:p xmlns:a="http://schemas.openxmlformats.org/drawingml/2006/main">
+            <a:r>
+              <a:t/>
+            </a:r>
+          </a:p>
+          <a:p xmlns:a="http://schemas.openxmlformats.org/drawingml/2006/main">
+            <a:r>
+              <a:t>屏显核对：</a:t>
+            </a:r>
+          </a:p>
+          <a:p xmlns:a="http://schemas.openxmlformats.org/drawingml/2006/main">
+            <a:r>
+              <a:t>第 3 课建立了：</a:t>
+            </a:r>
+          </a:p>
+          <a:p xmlns:a="http://schemas.openxmlformats.org/drawingml/2006/main">
+            <a:r>
+              <a:t>- 候选文献表</a:t>
+            </a:r>
+          </a:p>
+          <a:p xmlns:a="http://schemas.openxmlformats.org/drawingml/2006/main">
+            <a:r>
+              <a:t>- 角色／状态／筛选决定</a:t>
+            </a:r>
+          </a:p>
+          <a:p xmlns:a="http://schemas.openxmlformats.org/drawingml/2006/main">
+            <a:r>
+              <a:t>- 书目身份 + 一条拟用主张入口核验</a:t>
+            </a:r>
+          </a:p>
+          <a:p xmlns:a="http://schemas.openxmlformats.org/drawingml/2006/main">
+            <a:r>
+              <a:t/>
+            </a:r>
+          </a:p>
+          <a:p xmlns:a="http://schemas.openxmlformats.org/drawingml/2006/main">
+            <a:r>
+              <a:t>仍未解决：</a:t>
+            </a:r>
+          </a:p>
+          <a:p xmlns:a="http://schemas.openxmlformats.org/drawingml/2006/main">
+            <a:r>
+              <a:t>- 原文研究的任务和设置是什么？</a:t>
+            </a:r>
+          </a:p>
+          <a:p xmlns:a="http://schemas.openxmlformats.org/drawingml/2006/main">
+            <a:r>
+              <a:t>- AI 复述的措辞与原文一致吗？</a:t>
+            </a:r>
+          </a:p>
+          <a:p xmlns:a="http://schemas.openxmlformats.org/drawingml/2006/main">
+            <a:r>
+              <a:t>- AI 指向的图表位置真的对应它说的内容吗？</a:t>
+            </a:r>
+          </a:p>
+          <a:p xmlns:a="http://schemas.openxmlformats.org/drawingml/2006/main">
+            <a:r>
+              <a:t/>
+            </a:r>
+          </a:p>
+          <a:p xmlns:a="http://schemas.openxmlformats.org/drawingml/2006/main">
+            <a:r>
+              <a:t>&gt; 入口核验让一条拟用主张安全进入候选表，不代表整篇论文已完成精读。</a:t>
+            </a:r>
+          </a:p>
+          <a:p xmlns:a="http://schemas.openxmlformats.org/drawingml/2006/main">
+            <a:r>
+              <a:t/>
+            </a:r>
+          </a:p>
+          <a:p xmlns:a="http://schemas.openxmlformats.org/drawingml/2006/main">
+            <a:r>
+              <a:t>教师讲述：</a:t>
+            </a:r>
+          </a:p>
+          <a:p xmlns:a="http://schemas.openxmlformats.org/drawingml/2006/main">
+            <a:r>
+              <a:t>回扣第 3 课：候选文献表里的 `verified` 表示身份和至少一条拟用主张与原文一致，不表示多条主张、证据结构和局限已经读清。本课把论文进一步拆成可追溯的主张—位置—证据—判断。</a:t>
+            </a:r>
+          </a:p>
+          <a:p xmlns:a="http://schemas.openxmlformats.org/drawingml/2006/main">
+            <a:r>
+              <a:t/>
+            </a:r>
+          </a:p>
+          <a:p xmlns:a="http://schemas.openxmlformats.org/drawingml/2006/main">
+            <a:r>
+              <a:t>学生动作：</a:t>
+            </a:r>
+          </a:p>
+          <a:p xmlns:a="http://schemas.openxmlformats.org/drawingml/2006/main">
+            <a:r>
+              <a:t>快问：你最近一次把 AI 摘要直接搬进阅读卡，是什么时候？只听回答，不评价。</a:t>
+            </a:r>
+          </a:p>
+          <a:p xmlns:a="http://schemas.openxmlformats.org/drawingml/2006/main">
+            <a:r>
+              <a:t/>
+            </a:r>
+          </a:p>
+          <a:p xmlns:a="http://schemas.openxmlformats.org/drawingml/2006/main">
+            <a:r>
+              <a:t>本课板书、诊断与串词：</a:t>
+            </a:r>
+          </a:p>
+          <a:p xmlns:a="http://schemas.openxmlformats.org/drawingml/2006/main">
+            <a:r>
+              <a:t>本节替换同类口头提示，不增加既有时段。开场诊断嵌入现有开场/回顾，后续再沿原实践时段操作。</a:t>
+            </a:r>
+          </a:p>
+          <a:p xmlns:a="http://schemas.openxmlformats.org/drawingml/2006/main">
+            <a:r>
+              <a:t/>
+            </a:r>
+          </a:p>
+          <a:p xmlns:a="http://schemas.openxmlformats.org/drawingml/2006/main">
+            <a:r>
+              <a:t>- **板书主线**：主张原句 → 方法/结果位置 → 限定条件 → 本人判断。</a:t>
+            </a:r>
+          </a:p>
+          <a:p xmlns:a="http://schemas.openxmlformats.org/drawingml/2006/main">
+            <a:r>
+              <a:t>- **诊断问题**：摘要里的一句结果，能否直接变成本人结论？</a:t>
+            </a:r>
+          </a:p>
+          <a:p xmlns:a="http://schemas.openxmlformats.org/drawingml/2006/main">
+            <a:r>
+              <a:t>- **预期回答**：须回到方法、结果与范围，区分原文发现和自己推断。</a:t>
+            </a:r>
+          </a:p>
+          <a:p xmlns:a="http://schemas.openxmlformats.org/drawingml/2006/main">
+            <a:r>
+              <a:t>- **常见误答后的追问**：若只复述摘要，要求指出支持句在正文哪里以及没有回答什么。</a:t>
+            </a:r>
+          </a:p>
+          <a:p xmlns:a="http://schemas.openxmlformats.org/drawingml/2006/main">
+            <a:r>
+              <a:t>- **过渡串词**：“有了可定位的阅读卡，下一课才能跨论文比较。”</a:t>
+            </a:r>
+          </a:p>
+          <a:p xmlns:a="http://schemas.openxmlformats.org/drawingml/2006/main">
+            <a:r>
+              <a:t>- **当堂最小产出**：一张含原文位置与边界的阅读卡。</a:t>
+            </a:r>
+          </a:p>
+          <a:p xmlns:a="http://schemas.openxmlformats.org/drawingml/2006/main">
+            <a:r>
+              <a:t>- **退出记录**：写“已完成的动作、本人项目仍缺的证据/工件、下次补齐位置”。使用教师包时标明课堂方法练习，不能据此宣称本人研究门通过；正式提交课次仍为第 6、9、13、16 课。</a:t>
+            </a:r>
+          </a:p>
+          <a:p xmlns:a="http://schemas.openxmlformats.org/drawingml/2006/main">
+            <a:r>
+              <a:t/>
+            </a:r>
+          </a:p>
+          <a:p xmlns:a="http://schemas.openxmlformats.org/drawingml/2006/main">
+            <a:r>
+              <a:t>来源与边界：</a:t>
+            </a:r>
+          </a:p>
+          <a:p xmlns:a="http://schemas.openxmlformats.org/drawingml/2006/main">
+            <a:r>
+              <a:t>回扣第 3 课 handout §四 来源审计；[AGENTS.md](../../AGENTS.md) 证据标准。</a:t>
+            </a:r>
+          </a:p>
+          <a:p xmlns:a="http://schemas.openxmlformats.org/drawingml/2006/main">
+            <a:r>
+              <a:t/>
+            </a:r>
+          </a:p>
+          <a:p xmlns:a="http://schemas.openxmlformats.org/drawingml/2006/main">
+            <a:r>
+              <a:t>---</a:t>
+            </a:r>
+          </a:p>
+          <a:p xmlns:a="http://schemas.openxmlformats.org/drawingml/2006/main">
+            <a:r>
+              <a:t/>
             </a:r>
           </a:p>
           <a:p xmlns:a="http://schemas.openxmlformats.org/drawingml/2006/main">
@@ -1265,7 +2980,17 @@
           </a:p>
           <a:p xmlns:a="http://schemas.openxmlformats.org/drawingml/2006/main">
             <a:r>
-              <a:t>- 本页仅使用课程内部规则与教学材料。</a:t>
+              <a:t/>
+            </a:r>
+          </a:p>
+          <a:p xmlns:a="http://schemas.openxmlformats.org/drawingml/2006/main">
+            <a:r>
+              <a:t>- 本课 handout.md 与 slides.md</a:t>
+            </a:r>
+          </a:p>
+          <a:p xmlns:a="http://schemas.openxmlformats.org/drawingml/2006/main">
+            <a:r>
+              <a:t/>
             </a:r>
           </a:p>
           <a:p xmlns:a="http://schemas.openxmlformats.org/drawingml/2006/main">
@@ -1340,7 +3065,137 @@
           <a:lstStyle xmlns:a="http://schemas.openxmlformats.org/drawingml/2006/main"/>
           <a:p xmlns:a="http://schemas.openxmlformats.org/drawingml/2006/main">
             <a:r>
-              <a:t>页面标题：本课目标与课堂产出</a:t>
+              <a:t>页面：P03 本课目标与课堂产出</a:t>
+            </a:r>
+          </a:p>
+          <a:p xmlns:a="http://schemas.openxmlformats.org/drawingml/2006/main">
+            <a:r>
+              <a:t/>
+            </a:r>
+          </a:p>
+          <a:p xmlns:a="http://schemas.openxmlformats.org/drawingml/2006/main">
+            <a:r>
+              <a:t>讲义位置：本课讲义；见逐页母稿映射表</a:t>
+            </a:r>
+          </a:p>
+          <a:p xmlns:a="http://schemas.openxmlformats.org/drawingml/2006/main">
+            <a:r>
+              <a:t/>
+            </a:r>
+          </a:p>
+          <a:p xmlns:a="http://schemas.openxmlformats.org/drawingml/2006/main">
+            <a:r>
+              <a:t>屏显核对：</a:t>
+            </a:r>
+          </a:p>
+          <a:p xmlns:a="http://schemas.openxmlformats.org/drawingml/2006/main">
+            <a:r>
+              <a:t>完成本课后，你能：</a:t>
+            </a:r>
+          </a:p>
+          <a:p xmlns:a="http://schemas.openxmlformats.org/drawingml/2006/main">
+            <a:r>
+              <a:t/>
+            </a:r>
+          </a:p>
+          <a:p xmlns:a="http://schemas.openxmlformats.org/drawingml/2006/main">
+            <a:r>
+              <a:t>1. 用五步流程完成一篇论文的结构化精读；</a:t>
+            </a:r>
+          </a:p>
+          <a:p xmlns:a="http://schemas.openxmlformats.org/drawingml/2006/main">
+            <a:r>
+              <a:t>2. 区分 AI 主张与原文主张，回到原文检查任务/设置/指标/对照/限定；</a:t>
+            </a:r>
+          </a:p>
+          <a:p xmlns:a="http://schemas.openxmlformats.org/drawingml/2006/main">
+            <a:r>
+              <a:t>3. 识别 AI 错读、过度概括和伪造引用；记录 AI 错误/遗漏，未发现时记录已检查风险与依据；</a:t>
+            </a:r>
+          </a:p>
+          <a:p xmlns:a="http://schemas.openxmlformats.org/drawingml/2006/main">
+            <a:r>
+              <a:t>4. 建立阅读卡，记录页码、图表或章节位置。</a:t>
+            </a:r>
+          </a:p>
+          <a:p xmlns:a="http://schemas.openxmlformats.org/drawingml/2006/main">
+            <a:r>
+              <a:t/>
+            </a:r>
+          </a:p>
+          <a:p xmlns:a="http://schemas.openxmlformats.org/drawingml/2006/main">
+            <a:r>
+              <a:t>课堂最低产出：至少 1 张完整阅读卡 + 一条偏差审计记录 + 一条 AI 使用记录</a:t>
+            </a:r>
+          </a:p>
+          <a:p xmlns:a="http://schemas.openxmlformats.org/drawingml/2006/main">
+            <a:r>
+              <a:t/>
+            </a:r>
+          </a:p>
+          <a:p xmlns:a="http://schemas.openxmlformats.org/drawingml/2006/main">
+            <a:r>
+              <a:t>&gt; 本课不正式提交；第 6 课问题门前累计至少 3 张完整精读卡。</a:t>
+            </a:r>
+          </a:p>
+          <a:p xmlns:a="http://schemas.openxmlformats.org/drawingml/2006/main">
+            <a:r>
+              <a:t/>
+            </a:r>
+          </a:p>
+          <a:p xmlns:a="http://schemas.openxmlformats.org/drawingml/2006/main">
+            <a:r>
+              <a:t>教师讲述：</a:t>
+            </a:r>
+          </a:p>
+          <a:p xmlns:a="http://schemas.openxmlformats.org/drawingml/2006/main">
+            <a:r>
+              <a:t>明确边界：本课目标是跑通一次完整精读流程，不是读完一整篇论文。课堂至少完成 1 张字段齐全的阅读卡；项目在第 6 课问题门前累计至少 3 张。</a:t>
+            </a:r>
+          </a:p>
+          <a:p xmlns:a="http://schemas.openxmlformats.org/drawingml/2006/main">
+            <a:r>
+              <a:t/>
+            </a:r>
+          </a:p>
+          <a:p xmlns:a="http://schemas.openxmlformats.org/drawingml/2006/main">
+            <a:r>
+              <a:t>学生动作：</a:t>
+            </a:r>
+          </a:p>
+          <a:p xmlns:a="http://schemas.openxmlformats.org/drawingml/2006/main">
+            <a:r>
+              <a:t>无。</a:t>
+            </a:r>
+          </a:p>
+          <a:p xmlns:a="http://schemas.openxmlformats.org/drawingml/2006/main">
+            <a:r>
+              <a:t/>
+            </a:r>
+          </a:p>
+          <a:p xmlns:a="http://schemas.openxmlformats.org/drawingml/2006/main">
+            <a:r>
+              <a:t>来源与边界：</a:t>
+            </a:r>
+          </a:p>
+          <a:p xmlns:a="http://schemas.openxmlformats.org/drawingml/2006/main">
+            <a:r>
+              <a:t>[备课规划.md](../备课规划.md) 第 4 课目标段；[assignments.md](../../course/assignments.md) 研究门条件。</a:t>
+            </a:r>
+          </a:p>
+          <a:p xmlns:a="http://schemas.openxmlformats.org/drawingml/2006/main">
+            <a:r>
+              <a:t/>
+            </a:r>
+          </a:p>
+          <a:p xmlns:a="http://schemas.openxmlformats.org/drawingml/2006/main">
+            <a:r>
+              <a:t>---</a:t>
+            </a:r>
+          </a:p>
+          <a:p xmlns:a="http://schemas.openxmlformats.org/drawingml/2006/main">
+            <a:r>
+              <a:t/>
             </a:r>
           </a:p>
           <a:p xmlns:a="http://schemas.openxmlformats.org/drawingml/2006/main">
@@ -1350,7 +3205,17 @@
           </a:p>
           <a:p xmlns:a="http://schemas.openxmlformats.org/drawingml/2006/main">
             <a:r>
-              <a:t>- 本页仅使用课程内部规则与教学材料。</a:t>
+              <a:t/>
+            </a:r>
+          </a:p>
+          <a:p xmlns:a="http://schemas.openxmlformats.org/drawingml/2006/main">
+            <a:r>
+              <a:t>- 本课 handout.md 与 slides.md</a:t>
+            </a:r>
+          </a:p>
+          <a:p xmlns:a="http://schemas.openxmlformats.org/drawingml/2006/main">
+            <a:r>
+              <a:t/>
             </a:r>
           </a:p>
           <a:p xmlns:a="http://schemas.openxmlformats.org/drawingml/2006/main">
@@ -1425,7 +3290,127 @@
           <a:lstStyle xmlns:a="http://schemas.openxmlformats.org/drawingml/2006/main"/>
           <a:p xmlns:a="http://schemas.openxmlformats.org/drawingml/2006/main">
             <a:r>
-              <a:t>页面标题：读懂摘要不等于理解贡献</a:t>
+              <a:t>页面：P04 读懂摘要不等于理解贡献</a:t>
+            </a:r>
+          </a:p>
+          <a:p xmlns:a="http://schemas.openxmlformats.org/drawingml/2006/main">
+            <a:r>
+              <a:t/>
+            </a:r>
+          </a:p>
+          <a:p xmlns:a="http://schemas.openxmlformats.org/drawingml/2006/main">
+            <a:r>
+              <a:t>讲义位置：本课讲义；见逐页母稿映射表</a:t>
+            </a:r>
+          </a:p>
+          <a:p xmlns:a="http://schemas.openxmlformats.org/drawingml/2006/main">
+            <a:r>
+              <a:t/>
+            </a:r>
+          </a:p>
+          <a:p xmlns:a="http://schemas.openxmlformats.org/drawingml/2006/main">
+            <a:r>
+              <a:t>屏显核对：</a:t>
+            </a:r>
+          </a:p>
+          <a:p xmlns:a="http://schemas.openxmlformats.org/drawingml/2006/main">
+            <a:r>
+              <a:t>常见失败：</a:t>
+            </a:r>
+          </a:p>
+          <a:p xmlns:a="http://schemas.openxmlformats.org/drawingml/2006/main">
+            <a:r>
+              <a:t>- AI 摘要直接进阅读卡</a:t>
+            </a:r>
+          </a:p>
+          <a:p xmlns:a="http://schemas.openxmlformats.org/drawingml/2006/main">
+            <a:r>
+              <a:t>- 主张无原文位置</a:t>
+            </a:r>
+          </a:p>
+          <a:p xmlns:a="http://schemas.openxmlformats.org/drawingml/2006/main">
+            <a:r>
+              <a:t>- "降低"被写成"消除"</a:t>
+            </a:r>
+          </a:p>
+          <a:p xmlns:a="http://schemas.openxmlformats.org/drawingml/2006/main">
+            <a:r>
+              <a:t>- AI 质疑当结论</a:t>
+            </a:r>
+          </a:p>
+          <a:p xmlns:a="http://schemas.openxmlformats.org/drawingml/2006/main">
+            <a:r>
+              <a:t>- 偏差审计缺位</a:t>
+            </a:r>
+          </a:p>
+          <a:p xmlns:a="http://schemas.openxmlformats.org/drawingml/2006/main">
+            <a:r>
+              <a:t/>
+            </a:r>
+          </a:p>
+          <a:p xmlns:a="http://schemas.openxmlformats.org/drawingml/2006/main">
+            <a:r>
+              <a:t>&gt; 流畅 ≠ 一致；结构完整 ≠ 贡献清晰。</a:t>
+            </a:r>
+          </a:p>
+          <a:p xmlns:a="http://schemas.openxmlformats.org/drawingml/2006/main">
+            <a:r>
+              <a:t/>
+            </a:r>
+          </a:p>
+          <a:p xmlns:a="http://schemas.openxmlformats.org/drawingml/2006/main">
+            <a:r>
+              <a:t>教师讲述：</a:t>
+            </a:r>
+          </a:p>
+          <a:p xmlns:a="http://schemas.openxmlformats.org/drawingml/2006/main">
+            <a:r>
+              <a:t>暴露常见错误。AI 摘要可以快速建立阅读地图，但它的复述可能混入模型推断、措辞被改写、位置错指、限定遗漏。下面几页来看怎样用五步流程把精读变成可复查的追踪关系。</a:t>
+            </a:r>
+          </a:p>
+          <a:p xmlns:a="http://schemas.openxmlformats.org/drawingml/2006/main">
+            <a:r>
+              <a:t/>
+            </a:r>
+          </a:p>
+          <a:p xmlns:a="http://schemas.openxmlformats.org/drawingml/2006/main">
+            <a:r>
+              <a:t>学生动作：</a:t>
+            </a:r>
+          </a:p>
+          <a:p xmlns:a="http://schemas.openxmlformats.org/drawingml/2006/main">
+            <a:r>
+              <a:t>请学生举手：你是否曾经把 AI 摘要直接复制进阅读卡或证据表？只统计，不点名。</a:t>
+            </a:r>
+          </a:p>
+          <a:p xmlns:a="http://schemas.openxmlformats.org/drawingml/2006/main">
+            <a:r>
+              <a:t/>
+            </a:r>
+          </a:p>
+          <a:p xmlns:a="http://schemas.openxmlformats.org/drawingml/2006/main">
+            <a:r>
+              <a:t>来源与边界：</a:t>
+            </a:r>
+          </a:p>
+          <a:p xmlns:a="http://schemas.openxmlformats.org/drawingml/2006/main">
+            <a:r>
+              <a:t>[AGENTS.md](../../AGENTS.md) 证据标准；[reading-list.md](../../course/reading-list.md) AI 辅助阅读协议。</a:t>
+            </a:r>
+          </a:p>
+          <a:p xmlns:a="http://schemas.openxmlformats.org/drawingml/2006/main">
+            <a:r>
+              <a:t/>
+            </a:r>
+          </a:p>
+          <a:p xmlns:a="http://schemas.openxmlformats.org/drawingml/2006/main">
+            <a:r>
+              <a:t>---</a:t>
+            </a:r>
+          </a:p>
+          <a:p xmlns:a="http://schemas.openxmlformats.org/drawingml/2006/main">
+            <a:r>
+              <a:t/>
             </a:r>
           </a:p>
           <a:p xmlns:a="http://schemas.openxmlformats.org/drawingml/2006/main">
@@ -1435,7 +3420,17 @@
           </a:p>
           <a:p xmlns:a="http://schemas.openxmlformats.org/drawingml/2006/main">
             <a:r>
-              <a:t>- 本页仅使用课程内部规则与教学材料。</a:t>
+              <a:t/>
+            </a:r>
+          </a:p>
+          <a:p xmlns:a="http://schemas.openxmlformats.org/drawingml/2006/main">
+            <a:r>
+              <a:t>- 本课 handout.md 与 slides.md</a:t>
+            </a:r>
+          </a:p>
+          <a:p xmlns:a="http://schemas.openxmlformats.org/drawingml/2006/main">
+            <a:r>
+              <a:t/>
             </a:r>
           </a:p>
           <a:p xmlns:a="http://schemas.openxmlformats.org/drawingml/2006/main">
@@ -1510,7 +3505,127 @@
           <a:lstStyle xmlns:a="http://schemas.openxmlformats.org/drawingml/2006/main"/>
           <a:p xmlns:a="http://schemas.openxmlformats.org/drawingml/2006/main">
             <a:r>
-              <a:t>页面标题：第一步：AI 导航</a:t>
+              <a:t>页面：P05 第一步：AI 导航</a:t>
+            </a:r>
+          </a:p>
+          <a:p xmlns:a="http://schemas.openxmlformats.org/drawingml/2006/main">
+            <a:r>
+              <a:t/>
+            </a:r>
+          </a:p>
+          <a:p xmlns:a="http://schemas.openxmlformats.org/drawingml/2006/main">
+            <a:r>
+              <a:t>讲义位置：本课讲义；见逐页母稿映射表</a:t>
+            </a:r>
+          </a:p>
+          <a:p xmlns:a="http://schemas.openxmlformats.org/drawingml/2006/main">
+            <a:r>
+              <a:t/>
+            </a:r>
+          </a:p>
+          <a:p xmlns:a="http://schemas.openxmlformats.org/drawingml/2006/main">
+            <a:r>
+              <a:t>屏显核对：</a:t>
+            </a:r>
+          </a:p>
+          <a:p xmlns:a="http://schemas.openxmlformats.org/drawingml/2006/main">
+            <a:r>
+              <a:t>让 AI 给出：</a:t>
+            </a:r>
+          </a:p>
+          <a:p xmlns:a="http://schemas.openxmlformats.org/drawingml/2006/main">
+            <a:r>
+              <a:t>- 中心问题（一句话）</a:t>
+            </a:r>
+          </a:p>
+          <a:p xmlns:a="http://schemas.openxmlformats.org/drawingml/2006/main">
+            <a:r>
+              <a:t>- 论证结构（问题→方法→设置→结果→局限）</a:t>
+            </a:r>
+          </a:p>
+          <a:p xmlns:a="http://schemas.openxmlformats.org/drawingml/2006/main">
+            <a:r>
+              <a:t>- 关键术语</a:t>
+            </a:r>
+          </a:p>
+          <a:p xmlns:a="http://schemas.openxmlformats.org/drawingml/2006/main">
+            <a:r>
+              <a:t>- 预期证据位置（图表、公式、实验编号）</a:t>
+            </a:r>
+          </a:p>
+          <a:p xmlns:a="http://schemas.openxmlformats.org/drawingml/2006/main">
+            <a:r>
+              <a:t>- 待追问问题</a:t>
+            </a:r>
+          </a:p>
+          <a:p xmlns:a="http://schemas.openxmlformats.org/drawingml/2006/main">
+            <a:r>
+              <a:t/>
+            </a:r>
+          </a:p>
+          <a:p xmlns:a="http://schemas.openxmlformats.org/drawingml/2006/main">
+            <a:r>
+              <a:t>&gt; 全部标记"未核验"。</a:t>
+            </a:r>
+          </a:p>
+          <a:p xmlns:a="http://schemas.openxmlformats.org/drawingml/2006/main">
+            <a:r>
+              <a:t/>
+            </a:r>
+          </a:p>
+          <a:p xmlns:a="http://schemas.openxmlformats.org/drawingml/2006/main">
+            <a:r>
+              <a:t>教师讲述：</a:t>
+            </a:r>
+          </a:p>
+          <a:p xmlns:a="http://schemas.openxmlformats.org/drawingml/2006/main">
+            <a:r>
+              <a:t>AI 导航帮你快速建立阅读地图，决定哪些段落值得重点读。AI 指向的"图 3"可能是错的——这正是下一步要核验的。AI 导航输出只是路线提示，不是结论。</a:t>
+            </a:r>
+          </a:p>
+          <a:p xmlns:a="http://schemas.openxmlformats.org/drawingml/2006/main">
+            <a:r>
+              <a:t/>
+            </a:r>
+          </a:p>
+          <a:p xmlns:a="http://schemas.openxmlformats.org/drawingml/2006/main">
+            <a:r>
+              <a:t>学生动作：</a:t>
+            </a:r>
+          </a:p>
+          <a:p xmlns:a="http://schemas.openxmlformats.org/drawingml/2006/main">
+            <a:r>
+              <a:t>请学生说出：AI 导航的哪一项最容易被当成结论直接采纳？</a:t>
+            </a:r>
+          </a:p>
+          <a:p xmlns:a="http://schemas.openxmlformats.org/drawingml/2006/main">
+            <a:r>
+              <a:t/>
+            </a:r>
+          </a:p>
+          <a:p xmlns:a="http://schemas.openxmlformats.org/drawingml/2006/main">
+            <a:r>
+              <a:t>来源与边界：</a:t>
+            </a:r>
+          </a:p>
+          <a:p xmlns:a="http://schemas.openxmlformats.org/drawingml/2006/main">
+            <a:r>
+              <a:t>讲义 §二·1 AI 导航；[reading-list.md](../../course/reading-list.md) 第二节 AI 辅助阅读协议。</a:t>
+            </a:r>
+          </a:p>
+          <a:p xmlns:a="http://schemas.openxmlformats.org/drawingml/2006/main">
+            <a:r>
+              <a:t/>
+            </a:r>
+          </a:p>
+          <a:p xmlns:a="http://schemas.openxmlformats.org/drawingml/2006/main">
+            <a:r>
+              <a:t>---</a:t>
+            </a:r>
+          </a:p>
+          <a:p xmlns:a="http://schemas.openxmlformats.org/drawingml/2006/main">
+            <a:r>
+              <a:t/>
             </a:r>
           </a:p>
           <a:p xmlns:a="http://schemas.openxmlformats.org/drawingml/2006/main">
@@ -1520,7 +3635,17 @@
           </a:p>
           <a:p xmlns:a="http://schemas.openxmlformats.org/drawingml/2006/main">
             <a:r>
-              <a:t>- 本页仅使用课程内部规则与教学材料。</a:t>
+              <a:t/>
+            </a:r>
+          </a:p>
+          <a:p xmlns:a="http://schemas.openxmlformats.org/drawingml/2006/main">
+            <a:r>
+              <a:t>- 本课 handout.md 与 slides.md</a:t>
+            </a:r>
+          </a:p>
+          <a:p xmlns:a="http://schemas.openxmlformats.org/drawingml/2006/main">
+            <a:r>
+              <a:t/>
             </a:r>
           </a:p>
           <a:p xmlns:a="http://schemas.openxmlformats.org/drawingml/2006/main">
@@ -1595,7 +3720,147 @@
           <a:lstStyle xmlns:a="http://schemas.openxmlformats.org/drawingml/2006/main"/>
           <a:p xmlns:a="http://schemas.openxmlformats.org/drawingml/2006/main">
             <a:r>
-              <a:t>页面标题：第二步：原文核验与检查五项</a:t>
+              <a:t>页面：P06 第二步：原文核验与检查五项</a:t>
+            </a:r>
+          </a:p>
+          <a:p xmlns:a="http://schemas.openxmlformats.org/drawingml/2006/main">
+            <a:r>
+              <a:t/>
+            </a:r>
+          </a:p>
+          <a:p xmlns:a="http://schemas.openxmlformats.org/drawingml/2006/main">
+            <a:r>
+              <a:t>讲义位置：本课讲义；见逐页母稿映射表</a:t>
+            </a:r>
+          </a:p>
+          <a:p xmlns:a="http://schemas.openxmlformats.org/drawingml/2006/main">
+            <a:r>
+              <a:t/>
+            </a:r>
+          </a:p>
+          <a:p xmlns:a="http://schemas.openxmlformats.org/drawingml/2006/main">
+            <a:r>
+              <a:t>屏显核对：</a:t>
+            </a:r>
+          </a:p>
+          <a:p xmlns:a="http://schemas.openxmlformats.org/drawingml/2006/main">
+            <a:r>
+              <a:t>人工阅读指定段落，至少记录两个可复查位置：</a:t>
+            </a:r>
+          </a:p>
+          <a:p xmlns:a="http://schemas.openxmlformats.org/drawingml/2006/main">
+            <a:r>
+              <a:t>- 章节、页码、图表、公式或实验编号</a:t>
+            </a:r>
+          </a:p>
+          <a:p xmlns:a="http://schemas.openxmlformats.org/drawingml/2006/main">
+            <a:r>
+              <a:t/>
+            </a:r>
+          </a:p>
+          <a:p xmlns:a="http://schemas.openxmlformats.org/drawingml/2006/main">
+            <a:r>
+              <a:t>| 维度 | 检查问题 |</a:t>
+            </a:r>
+          </a:p>
+          <a:p xmlns:a="http://schemas.openxmlformats.org/drawingml/2006/main">
+            <a:r>
+              <a:t>| --- | --- |</a:t>
+            </a:r>
+          </a:p>
+          <a:p xmlns:a="http://schemas.openxmlformats.org/drawingml/2006/main">
+            <a:r>
+              <a:t>| 任务 | 原文任务和当前项目一样吗？ |</a:t>
+            </a:r>
+          </a:p>
+          <a:p xmlns:a="http://schemas.openxmlformats.org/drawingml/2006/main">
+            <a:r>
+              <a:t>| 设置 | 输入、规模、条件是什么？ |</a:t>
+            </a:r>
+          </a:p>
+          <a:p xmlns:a="http://schemas.openxmlformats.org/drawingml/2006/main">
+            <a:r>
+              <a:t>| 指标 | 用什么度量？定义一致吗？ |</a:t>
+            </a:r>
+          </a:p>
+          <a:p xmlns:a="http://schemas.openxmlformats.org/drawingml/2006/main">
+            <a:r>
+              <a:t>| 对照 | baseline 是什么？公平吗？ |</a:t>
+            </a:r>
+          </a:p>
+          <a:p xmlns:a="http://schemas.openxmlformats.org/drawingml/2006/main">
+            <a:r>
+              <a:t>| 限定 | 原文限定的范围是什么？ |</a:t>
+            </a:r>
+          </a:p>
+          <a:p xmlns:a="http://schemas.openxmlformats.org/drawingml/2006/main">
+            <a:r>
+              <a:t/>
+            </a:r>
+          </a:p>
+          <a:p xmlns:a="http://schemas.openxmlformats.org/drawingml/2006/main">
+            <a:r>
+              <a:t>&gt; 没有原文位置的主张，不能进入阅读卡的"作者主张"栏。</a:t>
+            </a:r>
+          </a:p>
+          <a:p xmlns:a="http://schemas.openxmlformats.org/drawingml/2006/main">
+            <a:r>
+              <a:t/>
+            </a:r>
+          </a:p>
+          <a:p xmlns:a="http://schemas.openxmlformats.org/drawingml/2006/main">
+            <a:r>
+              <a:t>教师讲述：</a:t>
+            </a:r>
+          </a:p>
+          <a:p xmlns:a="http://schemas.openxmlformats.org/drawingml/2006/main">
+            <a:r>
+              <a:t>原文核验不可跳过。核验产物是带位置的主张，例如"作者主张 X → §3.2, p.5, Fig.2"。AI 说"见图 3"但图 3 不是该内容时，要重新定位。这五项对应 Keshav 三遍阅读法第二遍的深度阅读检查点——不是要求读完整篇，而是采纳一条主张前检查它能不能用于当前项目。任务不同、指标定义不同、对照不公平或限定不匹配，都意味着这条主张不能直接迁移。</a:t>
+            </a:r>
+          </a:p>
+          <a:p xmlns:a="http://schemas.openxmlformats.org/drawingml/2006/main">
+            <a:r>
+              <a:t/>
+            </a:r>
+          </a:p>
+          <a:p xmlns:a="http://schemas.openxmlformats.org/drawingml/2006/main">
+            <a:r>
+              <a:t>学生动作：</a:t>
+            </a:r>
+          </a:p>
+          <a:p xmlns:a="http://schemas.openxmlformats.org/drawingml/2006/main">
+            <a:r>
+              <a:t>让学生用自己的论文记录一个可复查位置，并选一条主张检查五项中最容易被忽略的。</a:t>
+            </a:r>
+          </a:p>
+          <a:p xmlns:a="http://schemas.openxmlformats.org/drawingml/2006/main">
+            <a:r>
+              <a:t/>
+            </a:r>
+          </a:p>
+          <a:p xmlns:a="http://schemas.openxmlformats.org/drawingml/2006/main">
+            <a:r>
+              <a:t>来源与边界：</a:t>
+            </a:r>
+          </a:p>
+          <a:p xmlns:a="http://schemas.openxmlformats.org/drawingml/2006/main">
+            <a:r>
+              <a:t>讲义 §二·2 原文核验；§三·2 回到原文检查什么；Keshav "How to Read a Paper"（[reading-list.md](../../course/reading-list.md) 第 4 课）。</a:t>
+            </a:r>
+          </a:p>
+          <a:p xmlns:a="http://schemas.openxmlformats.org/drawingml/2006/main">
+            <a:r>
+              <a:t/>
+            </a:r>
+          </a:p>
+          <a:p xmlns:a="http://schemas.openxmlformats.org/drawingml/2006/main">
+            <a:r>
+              <a:t>---</a:t>
+            </a:r>
+          </a:p>
+          <a:p xmlns:a="http://schemas.openxmlformats.org/drawingml/2006/main">
+            <a:r>
+              <a:t/>
             </a:r>
           </a:p>
           <a:p xmlns:a="http://schemas.openxmlformats.org/drawingml/2006/main">
@@ -1605,7 +3870,17 @@
           </a:p>
           <a:p xmlns:a="http://schemas.openxmlformats.org/drawingml/2006/main">
             <a:r>
-              <a:t>- 本页仅使用课程内部规则与教学材料。</a:t>
+              <a:t/>
+            </a:r>
+          </a:p>
+          <a:p xmlns:a="http://schemas.openxmlformats.org/drawingml/2006/main">
+            <a:r>
+              <a:t>- 本课 handout.md 与 slides.md</a:t>
+            </a:r>
+          </a:p>
+          <a:p xmlns:a="http://schemas.openxmlformats.org/drawingml/2006/main">
+            <a:r>
+              <a:t/>
             </a:r>
           </a:p>
           <a:p xmlns:a="http://schemas.openxmlformats.org/drawingml/2006/main">
@@ -1680,7 +3955,127 @@
           <a:lstStyle xmlns:a="http://schemas.openxmlformats.org/drawingml/2006/main"/>
           <a:p xmlns:a="http://schemas.openxmlformats.org/drawingml/2006/main">
             <a:r>
-              <a:t>页面标题：第三步：AI 质疑</a:t>
+              <a:t>页面：P07 第三步：AI 质疑</a:t>
+            </a:r>
+          </a:p>
+          <a:p xmlns:a="http://schemas.openxmlformats.org/drawingml/2006/main">
+            <a:r>
+              <a:t/>
+            </a:r>
+          </a:p>
+          <a:p xmlns:a="http://schemas.openxmlformats.org/drawingml/2006/main">
+            <a:r>
+              <a:t>讲义位置：本课讲义；见逐页母稿映射表</a:t>
+            </a:r>
+          </a:p>
+          <a:p xmlns:a="http://schemas.openxmlformats.org/drawingml/2006/main">
+            <a:r>
+              <a:t/>
+            </a:r>
+          </a:p>
+          <a:p xmlns:a="http://schemas.openxmlformats.org/drawingml/2006/main">
+            <a:r>
+              <a:t>屏显核对：</a:t>
+            </a:r>
+          </a:p>
+          <a:p xmlns:a="http://schemas.openxmlformats.org/drawingml/2006/main">
+            <a:r>
+              <a:t>让 AI 根据已核验内容提出：</a:t>
+            </a:r>
+          </a:p>
+          <a:p xmlns:a="http://schemas.openxmlformats.org/drawingml/2006/main">
+            <a:r>
+              <a:t>- 这个结果在什么条件下会被推翻？</a:t>
+            </a:r>
+          </a:p>
+          <a:p xmlns:a="http://schemas.openxmlformats.org/drawingml/2006/main">
+            <a:r>
+              <a:t>- 对照是否公平？baseline 是否被低估？</a:t>
+            </a:r>
+          </a:p>
+          <a:p xmlns:a="http://schemas.openxmlformats.org/drawingml/2006/main">
+            <a:r>
+              <a:t>- 样本规模是否足以支撑结论强度？</a:t>
+            </a:r>
+          </a:p>
+          <a:p xmlns:a="http://schemas.openxmlformats.org/drawingml/2006/main">
+            <a:r>
+              <a:t>- 原文限定条件是否被笔记遗漏？</a:t>
+            </a:r>
+          </a:p>
+          <a:p xmlns:a="http://schemas.openxmlformats.org/drawingml/2006/main">
+            <a:r>
+              <a:t>- 是否存在原文未讨论的替代解释？</a:t>
+            </a:r>
+          </a:p>
+          <a:p xmlns:a="http://schemas.openxmlformats.org/drawingml/2006/main">
+            <a:r>
+              <a:t/>
+            </a:r>
+          </a:p>
+          <a:p xmlns:a="http://schemas.openxmlformats.org/drawingml/2006/main">
+            <a:r>
+              <a:t>&gt; AI 质疑是候选问题，不是判断。需要回到原文检查。</a:t>
+            </a:r>
+          </a:p>
+          <a:p xmlns:a="http://schemas.openxmlformats.org/drawingml/2006/main">
+            <a:r>
+              <a:t/>
+            </a:r>
+          </a:p>
+          <a:p xmlns:a="http://schemas.openxmlformats.org/drawingml/2006/main">
+            <a:r>
+              <a:t>教师讲述：</a:t>
+            </a:r>
+          </a:p>
+          <a:p xmlns:a="http://schemas.openxmlformats.org/drawingml/2006/main">
+            <a:r>
+              <a:t>AI 质疑暴露你自己的盲点。你可能因为觉得方法"看起来合理"而跳过对照设计或限定条件。AI 质疑的输出仍然只是候选问题，不是判断——你需要回到原文检查每个问题，而不是直接采纳。</a:t>
+            </a:r>
+          </a:p>
+          <a:p xmlns:a="http://schemas.openxmlformats.org/drawingml/2006/main">
+            <a:r>
+              <a:t/>
+            </a:r>
+          </a:p>
+          <a:p xmlns:a="http://schemas.openxmlformats.org/drawingml/2006/main">
+            <a:r>
+              <a:t>学生动作：</a:t>
+            </a:r>
+          </a:p>
+          <a:p xmlns:a="http://schemas.openxmlformats.org/drawingml/2006/main">
+            <a:r>
+              <a:t>请学生说出一个自己最容易跳过的检查项。</a:t>
+            </a:r>
+          </a:p>
+          <a:p xmlns:a="http://schemas.openxmlformats.org/drawingml/2006/main">
+            <a:r>
+              <a:t/>
+            </a:r>
+          </a:p>
+          <a:p xmlns:a="http://schemas.openxmlformats.org/drawingml/2006/main">
+            <a:r>
+              <a:t>来源与边界：</a:t>
+            </a:r>
+          </a:p>
+          <a:p xmlns:a="http://schemas.openxmlformats.org/drawingml/2006/main">
+            <a:r>
+              <a:t>讲义 §二·3 AI 质疑；[reading-list.md](../../course/reading-list.md) 第二节。</a:t>
+            </a:r>
+          </a:p>
+          <a:p xmlns:a="http://schemas.openxmlformats.org/drawingml/2006/main">
+            <a:r>
+              <a:t/>
+            </a:r>
+          </a:p>
+          <a:p xmlns:a="http://schemas.openxmlformats.org/drawingml/2006/main">
+            <a:r>
+              <a:t>---</a:t>
+            </a:r>
+          </a:p>
+          <a:p xmlns:a="http://schemas.openxmlformats.org/drawingml/2006/main">
+            <a:r>
+              <a:t/>
             </a:r>
           </a:p>
           <a:p xmlns:a="http://schemas.openxmlformats.org/drawingml/2006/main">
@@ -1690,7 +4085,17 @@
           </a:p>
           <a:p xmlns:a="http://schemas.openxmlformats.org/drawingml/2006/main">
             <a:r>
-              <a:t>- 本页仅使用课程内部规则与教学材料。</a:t>
+              <a:t/>
+            </a:r>
+          </a:p>
+          <a:p xmlns:a="http://schemas.openxmlformats.org/drawingml/2006/main">
+            <a:r>
+              <a:t>- 本课 handout.md 与 slides.md</a:t>
+            </a:r>
+          </a:p>
+          <a:p xmlns:a="http://schemas.openxmlformats.org/drawingml/2006/main">
+            <a:r>
+              <a:t/>
             </a:r>
           </a:p>
           <a:p xmlns:a="http://schemas.openxmlformats.org/drawingml/2006/main">
@@ -1765,7 +4170,142 @@
           <a:lstStyle xmlns:a="http://schemas.openxmlformats.org/drawingml/2006/main"/>
           <a:p xmlns:a="http://schemas.openxmlformats.org/drawingml/2006/main">
             <a:r>
-              <a:t>页面标题：第四步：偏差审计与错读类型</a:t>
+              <a:t>页面：P08 第四步：偏差审计与错读类型</a:t>
+            </a:r>
+          </a:p>
+          <a:p xmlns:a="http://schemas.openxmlformats.org/drawingml/2006/main">
+            <a:r>
+              <a:t/>
+            </a:r>
+          </a:p>
+          <a:p xmlns:a="http://schemas.openxmlformats.org/drawingml/2006/main">
+            <a:r>
+              <a:t>讲义位置：本课讲义；见逐页母稿映射表</a:t>
+            </a:r>
+          </a:p>
+          <a:p xmlns:a="http://schemas.openxmlformats.org/drawingml/2006/main">
+            <a:r>
+              <a:t/>
+            </a:r>
+          </a:p>
+          <a:p xmlns:a="http://schemas.openxmlformats.org/drawingml/2006/main">
+            <a:r>
+              <a:t>屏显核对：</a:t>
+            </a:r>
+          </a:p>
+          <a:p xmlns:a="http://schemas.openxmlformats.org/drawingml/2006/main">
+            <a:r>
+              <a:t>偏差类型：</a:t>
+            </a:r>
+          </a:p>
+          <a:p xmlns:a="http://schemas.openxmlformats.org/drawingml/2006/main">
+            <a:r>
+              <a:t>- 过度概括：原文"降低"被写成"消除"</a:t>
+            </a:r>
+          </a:p>
+          <a:p xmlns:a="http://schemas.openxmlformats.org/drawingml/2006/main">
+            <a:r>
+              <a:t>- 位置错指：AI 说"见图 2"但图 2 不是该内容</a:t>
+            </a:r>
+          </a:p>
+          <a:p xmlns:a="http://schemas.openxmlformats.org/drawingml/2006/main">
+            <a:r>
+              <a:t>- 限定遗漏：原文"计算机领域"被省略</a:t>
+            </a:r>
+          </a:p>
+          <a:p xmlns:a="http://schemas.openxmlformats.org/drawingml/2006/main">
+            <a:r>
+              <a:t>- 张冠李戴：把参考文献的方法写成本文方法</a:t>
+            </a:r>
+          </a:p>
+          <a:p xmlns:a="http://schemas.openxmlformats.org/drawingml/2006/main">
+            <a:r>
+              <a:t>- 伪造引用：题名/作者/页码与正式来源不符</a:t>
+            </a:r>
+          </a:p>
+          <a:p xmlns:a="http://schemas.openxmlformats.org/drawingml/2006/main">
+            <a:r>
+              <a:t/>
+            </a:r>
+          </a:p>
+          <a:p xmlns:a="http://schemas.openxmlformats.org/drawingml/2006/main">
+            <a:r>
+              <a:t>最小记录表：</a:t>
+            </a:r>
+          </a:p>
+          <a:p xmlns:a="http://schemas.openxmlformats.org/drawingml/2006/main">
+            <a:r>
+              <a:t>| AI 输出 | 偏差类型 | 原文实际 | 核验位置 | 处理 |</a:t>
+            </a:r>
+          </a:p>
+          <a:p xmlns:a="http://schemas.openxmlformats.org/drawingml/2006/main">
+            <a:r>
+              <a:t/>
+            </a:r>
+          </a:p>
+          <a:p xmlns:a="http://schemas.openxmlformats.org/drawingml/2006/main">
+            <a:r>
+              <a:t>&gt; 至少记录一处 AI 错误或遗漏；未发现时记录已检查风险与核验依据。第 3 课处理"文献是否真实"，本课处理"复述是否一致"。</a:t>
+            </a:r>
+          </a:p>
+          <a:p xmlns:a="http://schemas.openxmlformats.org/drawingml/2006/main">
+            <a:r>
+              <a:t/>
+            </a:r>
+          </a:p>
+          <a:p xmlns:a="http://schemas.openxmlformats.org/drawingml/2006/main">
+            <a:r>
+              <a:t>教师讲述：</a:t>
+            </a:r>
+          </a:p>
+          <a:p xmlns:a="http://schemas.openxmlformats.org/drawingml/2006/main">
+            <a:r>
+              <a:t>偏差审计记录的是可复查的偏差，是后续评价 AI 辅助阅读工作流的重要证据。第 3 课的来源审计是入口核验，本课是内容核验——一条论文可以 身份已核验（存在且 DOI 正确，但拟用主张仍须对回原文），但 AI 对它的复述仍可能错读、过度概括或位置错指。偏差审计表记录的就是这种内容层面的偏差。未发现明显错误时，记录检查过的风险点及核验依据，不虚构错误。</a:t>
+            </a:r>
+          </a:p>
+          <a:p xmlns:a="http://schemas.openxmlformats.org/drawingml/2006/main">
+            <a:r>
+              <a:t/>
+            </a:r>
+          </a:p>
+          <a:p xmlns:a="http://schemas.openxmlformats.org/drawingml/2006/main">
+            <a:r>
+              <a:t>学生动作：</a:t>
+            </a:r>
+          </a:p>
+          <a:p xmlns:a="http://schemas.openxmlformats.org/drawingml/2006/main">
+            <a:r>
+              <a:t>无。直接进入下一步。</a:t>
+            </a:r>
+          </a:p>
+          <a:p xmlns:a="http://schemas.openxmlformats.org/drawingml/2006/main">
+            <a:r>
+              <a:t/>
+            </a:r>
+          </a:p>
+          <a:p xmlns:a="http://schemas.openxmlformats.org/drawingml/2006/main">
+            <a:r>
+              <a:t>来源与边界：</a:t>
+            </a:r>
+          </a:p>
+          <a:p xmlns:a="http://schemas.openxmlformats.org/drawingml/2006/main">
+            <a:r>
+              <a:t>讲义 §二·4 偏差审计；§三·3 错读、过度概括与伪造引用；第 3 课 handout §四 来源审计；[AGENTS.md](../../AGENTS.md) "失败记录是后续评价工作流的重要证据"。</a:t>
+            </a:r>
+          </a:p>
+          <a:p xmlns:a="http://schemas.openxmlformats.org/drawingml/2006/main">
+            <a:r>
+              <a:t/>
+            </a:r>
+          </a:p>
+          <a:p xmlns:a="http://schemas.openxmlformats.org/drawingml/2006/main">
+            <a:r>
+              <a:t>---</a:t>
+            </a:r>
+          </a:p>
+          <a:p xmlns:a="http://schemas.openxmlformats.org/drawingml/2006/main">
+            <a:r>
+              <a:t/>
             </a:r>
           </a:p>
           <a:p xmlns:a="http://schemas.openxmlformats.org/drawingml/2006/main">
@@ -1775,7 +4315,17 @@
           </a:p>
           <a:p xmlns:a="http://schemas.openxmlformats.org/drawingml/2006/main">
             <a:r>
-              <a:t>- 本页仅使用课程内部规则与教学材料。</a:t>
+              <a:t/>
+            </a:r>
+          </a:p>
+          <a:p xmlns:a="http://schemas.openxmlformats.org/drawingml/2006/main">
+            <a:r>
+              <a:t>- 本课 handout.md 与 slides.md</a:t>
+            </a:r>
+          </a:p>
+          <a:p xmlns:a="http://schemas.openxmlformats.org/drawingml/2006/main">
+            <a:r>
+              <a:t/>
             </a:r>
           </a:p>
           <a:p xmlns:a="http://schemas.openxmlformats.org/drawingml/2006/main">
@@ -1850,7 +4400,162 @@
           <a:lstStyle xmlns:a="http://schemas.openxmlformats.org/drawingml/2006/main"/>
           <a:p xmlns:a="http://schemas.openxmlformats.org/drawingml/2006/main">
             <a:r>
-              <a:t>页面标题：第五步：人工定稿与主张区分</a:t>
+              <a:t>页面：P09 第五步：人工定稿与主张区分</a:t>
+            </a:r>
+          </a:p>
+          <a:p xmlns:a="http://schemas.openxmlformats.org/drawingml/2006/main">
+            <a:r>
+              <a:t/>
+            </a:r>
+          </a:p>
+          <a:p xmlns:a="http://schemas.openxmlformats.org/drawingml/2006/main">
+            <a:r>
+              <a:t>讲义位置：本课讲义；见逐页母稿映射表</a:t>
+            </a:r>
+          </a:p>
+          <a:p xmlns:a="http://schemas.openxmlformats.org/drawingml/2006/main">
+            <a:r>
+              <a:t/>
+            </a:r>
+          </a:p>
+          <a:p xmlns:a="http://schemas.openxmlformats.org/drawingml/2006/main">
+            <a:r>
+              <a:t>屏显核对：</a:t>
+            </a:r>
+          </a:p>
+          <a:p xmlns:a="http://schemas.openxmlformats.org/drawingml/2006/main">
+            <a:r>
+              <a:t>一条 AI 复述的可能来源：</a:t>
+            </a:r>
+          </a:p>
+          <a:p xmlns:a="http://schemas.openxmlformats.org/drawingml/2006/main">
+            <a:r>
+              <a:t>- 原文确实写了（作者主张）</a:t>
+            </a:r>
+          </a:p>
+          <a:p xmlns:a="http://schemas.openxmlformats.org/drawingml/2006/main">
+            <a:r>
+              <a:t>- 原文相关，AI 推断出更具体结论（模型推断）</a:t>
+            </a:r>
+          </a:p>
+          <a:p xmlns:a="http://schemas.openxmlformats.org/drawingml/2006/main">
+            <a:r>
+              <a:t>- 原文没写，AI 根据常识补充（模型新增）</a:t>
+            </a:r>
+          </a:p>
+          <a:p xmlns:a="http://schemas.openxmlformats.org/drawingml/2006/main">
+            <a:r>
+              <a:t>- 措辞强度被改写（过度概括）</a:t>
+            </a:r>
+          </a:p>
+          <a:p xmlns:a="http://schemas.openxmlformats.org/drawingml/2006/main">
+            <a:r>
+              <a:t/>
+            </a:r>
+          </a:p>
+          <a:p xmlns:a="http://schemas.openxmlformats.org/drawingml/2006/main">
+            <a:r>
+              <a:t>&gt; 只有第一种能进入"作者主张"栏。</a:t>
+            </a:r>
+          </a:p>
+          <a:p xmlns:a="http://schemas.openxmlformats.org/drawingml/2006/main">
+            <a:r>
+              <a:t/>
+            </a:r>
+          </a:p>
+          <a:p xmlns:a="http://schemas.openxmlformats.org/drawingml/2006/main">
+            <a:r>
+              <a:t>由学生写出最终阅读卡，区分：</a:t>
+            </a:r>
+          </a:p>
+          <a:p xmlns:a="http://schemas.openxmlformats.org/drawingml/2006/main">
+            <a:r>
+              <a:t>- 作者主张（带原文位置）</a:t>
+            </a:r>
+          </a:p>
+          <a:p xmlns:a="http://schemas.openxmlformats.org/drawingml/2006/main">
+            <a:r>
+              <a:t>- 原文证据（指标/对照/样本/限定）</a:t>
+            </a:r>
+          </a:p>
+          <a:p xmlns:a="http://schemas.openxmlformats.org/drawingml/2006/main">
+            <a:r>
+              <a:t>- 个人判断（适用性/待验证/与项目关系）</a:t>
+            </a:r>
+          </a:p>
+          <a:p xmlns:a="http://schemas.openxmlformats.org/drawingml/2006/main">
+            <a:r>
+              <a:t>- AI 建议（导航/质疑/偏差记录）</a:t>
+            </a:r>
+          </a:p>
+          <a:p xmlns:a="http://schemas.openxmlformats.org/drawingml/2006/main">
+            <a:r>
+              <a:t/>
+            </a:r>
+          </a:p>
+          <a:p xmlns:a="http://schemas.openxmlformats.org/drawingml/2006/main">
+            <a:r>
+              <a:t>&gt; 判断责任在学生。AI 可以建议，不能定稿。</a:t>
+            </a:r>
+          </a:p>
+          <a:p xmlns:a="http://schemas.openxmlformats.org/drawingml/2006/main">
+            <a:r>
+              <a:t/>
+            </a:r>
+          </a:p>
+          <a:p xmlns:a="http://schemas.openxmlformats.org/drawingml/2006/main">
+            <a:r>
+              <a:t>教师讲述：</a:t>
+            </a:r>
+          </a:p>
+          <a:p xmlns:a="http://schemas.openxmlformats.org/drawingml/2006/main">
+            <a:r>
+              <a:t>不区分的话，研究者会把 AI 推断误当成作者主张，再带进证据地图。第 5 课的证据地图质量取决于阅读卡的主张是否真实来自原文。人工定稿的判断责任在学生——阅读卡里"作者主张"必须能回到原文位置，"个人判断"必须写明理由和适用边界。AI 可以建议措辞、补充候选、提出质疑，但四栏必须分清，不能混在一栏。</a:t>
+            </a:r>
+          </a:p>
+          <a:p xmlns:a="http://schemas.openxmlformats.org/drawingml/2006/main">
+            <a:r>
+              <a:t/>
+            </a:r>
+          </a:p>
+          <a:p xmlns:a="http://schemas.openxmlformats.org/drawingml/2006/main">
+            <a:r>
+              <a:t>学生动作：</a:t>
+            </a:r>
+          </a:p>
+          <a:p xmlns:a="http://schemas.openxmlformats.org/drawingml/2006/main">
+            <a:r>
+              <a:t>请学生指出：你之前的阅读卡或笔记里，哪一栏和 AI 建议混在一起了？</a:t>
+            </a:r>
+          </a:p>
+          <a:p xmlns:a="http://schemas.openxmlformats.org/drawingml/2006/main">
+            <a:r>
+              <a:t/>
+            </a:r>
+          </a:p>
+          <a:p xmlns:a="http://schemas.openxmlformats.org/drawingml/2006/main">
+            <a:r>
+              <a:t>来源与边界：</a:t>
+            </a:r>
+          </a:p>
+          <a:p xmlns:a="http://schemas.openxmlformats.org/drawingml/2006/main">
+            <a:r>
+              <a:t>讲义 §二·5 人工定稿；§三·1 为什么区分 AI 主张与原文主张；[AGENTS.md](../../AGENTS.md) "AI 输出本身不构成证据"；[reading-list.md](../../course/reading-list.md) 第二节第五步。</a:t>
+            </a:r>
+          </a:p>
+          <a:p xmlns:a="http://schemas.openxmlformats.org/drawingml/2006/main">
+            <a:r>
+              <a:t/>
+            </a:r>
+          </a:p>
+          <a:p xmlns:a="http://schemas.openxmlformats.org/drawingml/2006/main">
+            <a:r>
+              <a:t>---</a:t>
+            </a:r>
+          </a:p>
+          <a:p xmlns:a="http://schemas.openxmlformats.org/drawingml/2006/main">
+            <a:r>
+              <a:t/>
             </a:r>
           </a:p>
           <a:p xmlns:a="http://schemas.openxmlformats.org/drawingml/2006/main">
@@ -1860,7 +4565,17 @@
           </a:p>
           <a:p xmlns:a="http://schemas.openxmlformats.org/drawingml/2006/main">
             <a:r>
-              <a:t>- 本页仅使用课程内部规则与教学材料。</a:t>
+              <a:t/>
+            </a:r>
+          </a:p>
+          <a:p xmlns:a="http://schemas.openxmlformats.org/drawingml/2006/main">
+            <a:r>
+              <a:t>- 本课 handout.md 与 slides.md</a:t>
+            </a:r>
+          </a:p>
+          <a:p xmlns:a="http://schemas.openxmlformats.org/drawingml/2006/main">
+            <a:r>
+              <a:t/>
             </a:r>
           </a:p>
           <a:p xmlns:a="http://schemas.openxmlformats.org/drawingml/2006/main">
@@ -1916,7 +4631,7 @@
           <p:nvPr/>
         </p:nvPicPr>
         <p:blipFill>
-          <a:blip xmlns:r="http://schemas.openxmlformats.org/officeDocument/2006/relationships" xmlns:a="http://schemas.openxmlformats.org/drawingml/2006/main" r:embed="R2d8a5a0e55804e69">
+          <a:blip xmlns:r="http://schemas.openxmlformats.org/officeDocument/2006/relationships" xmlns:a="http://schemas.openxmlformats.org/drawingml/2006/main" r:embed="Rc1e148980d954c1a">
             <a:duotone>
               <a:prstClr val="black"/>
               <a:schemeClr val="accent1">
@@ -2094,7 +4809,7 @@
           <p:nvPr/>
         </p:nvPicPr>
         <p:blipFill rotWithShape="1">
-          <a:blip xmlns:r="http://schemas.openxmlformats.org/officeDocument/2006/relationships" xmlns:a="http://schemas.openxmlformats.org/drawingml/2006/main" r:embed="Rb9f8833836a049a5"/>
+          <a:blip xmlns:r="http://schemas.openxmlformats.org/officeDocument/2006/relationships" xmlns:a="http://schemas.openxmlformats.org/drawingml/2006/main" r:embed="R2387c45a804947f8"/>
           <a:srcRect xmlns:a="http://schemas.openxmlformats.org/drawingml/2006/main" l="74359" t="0" r="1346" b="0"/>
           <a:stretch xmlns:a="http://schemas.openxmlformats.org/drawingml/2006/main"/>
         </p:blipFill>
@@ -2117,7 +4832,7 @@
           <p:nvPr/>
         </p:nvPicPr>
         <p:blipFill rotWithShape="1">
-          <a:blip xmlns:r="http://schemas.openxmlformats.org/officeDocument/2006/relationships" xmlns:a="http://schemas.openxmlformats.org/drawingml/2006/main" r:embed="Rd7db435bccbf439a">
+          <a:blip xmlns:r="http://schemas.openxmlformats.org/officeDocument/2006/relationships" xmlns:a="http://schemas.openxmlformats.org/drawingml/2006/main" r:embed="Rc5f68383257f451d">
             <a:alphaModFix amt="35000"/>
           </a:blip>
           <a:srcRect xmlns:a="http://schemas.openxmlformats.org/drawingml/2006/main" l="0" t="9831" r="0" b="36385"/>
@@ -2379,7 +5094,7 @@
           <p:nvPr/>
         </p:nvPicPr>
         <p:blipFill>
-          <a:blip xmlns:r="http://schemas.openxmlformats.org/officeDocument/2006/relationships" xmlns:a="http://schemas.openxmlformats.org/drawingml/2006/main" r:embed="Re4bd51069da14543"/>
+          <a:blip xmlns:r="http://schemas.openxmlformats.org/officeDocument/2006/relationships" xmlns:a="http://schemas.openxmlformats.org/drawingml/2006/main" r:embed="R1020e106d3ad43fa"/>
           <a:srcRect xmlns:a="http://schemas.openxmlformats.org/drawingml/2006/main" l="0" t="0" r="54251" b="0"/>
           <a:stretch xmlns:a="http://schemas.openxmlformats.org/drawingml/2006/main"/>
         </p:blipFill>
@@ -2636,7 +5351,7 @@
           <p:nvPr/>
         </p:nvPicPr>
         <p:blipFill rotWithShape="1">
-          <a:blip xmlns:r="http://schemas.openxmlformats.org/officeDocument/2006/relationships" xmlns:a="http://schemas.openxmlformats.org/drawingml/2006/main" r:embed="R59ed9dcd073d4947"/>
+          <a:blip xmlns:r="http://schemas.openxmlformats.org/officeDocument/2006/relationships" xmlns:a="http://schemas.openxmlformats.org/drawingml/2006/main" r:embed="Rda95e281f8224b22"/>
           <a:srcRect xmlns:a="http://schemas.openxmlformats.org/drawingml/2006/main" l="0" t="0" r="1346" b="0"/>
           <a:stretch xmlns:a="http://schemas.openxmlformats.org/drawingml/2006/main"/>
         </p:blipFill>
@@ -2819,7 +5534,7 @@
           <p:nvPr/>
         </p:nvPicPr>
         <p:blipFill>
-          <a:blip xmlns:r="http://schemas.openxmlformats.org/officeDocument/2006/relationships" xmlns:a="http://schemas.openxmlformats.org/drawingml/2006/main" r:embed="R58ac6e558c334973"/>
+          <a:blip xmlns:r="http://schemas.openxmlformats.org/officeDocument/2006/relationships" xmlns:a="http://schemas.openxmlformats.org/drawingml/2006/main" r:embed="Rb6f835ca00a54b7d"/>
           <a:stretch xmlns:a="http://schemas.openxmlformats.org/drawingml/2006/main">
             <a:fillRect l="0" t="0" r="0" b="0"/>
           </a:stretch>
@@ -2915,7 +5630,7 @@
           <p:nvPr/>
         </p:nvPicPr>
         <p:blipFill>
-          <a:blip xmlns:r="http://schemas.openxmlformats.org/officeDocument/2006/relationships" xmlns:a="http://schemas.openxmlformats.org/drawingml/2006/main" r:embed="Re6fbf82987c542d0">
+          <a:blip xmlns:r="http://schemas.openxmlformats.org/officeDocument/2006/relationships" xmlns:a="http://schemas.openxmlformats.org/drawingml/2006/main" r:embed="R265a951874454a6e">
             <a:duotone>
               <a:prstClr val="black"/>
               <a:schemeClr val="accent1">
@@ -3082,7 +5797,7 @@
           <p:nvPr/>
         </p:nvPicPr>
         <p:blipFill rotWithShape="1">
-          <a:blip xmlns:r="http://schemas.openxmlformats.org/officeDocument/2006/relationships" xmlns:a="http://schemas.openxmlformats.org/drawingml/2006/main" r:embed="R990869fc9b034b97">
+          <a:blip xmlns:r="http://schemas.openxmlformats.org/officeDocument/2006/relationships" xmlns:a="http://schemas.openxmlformats.org/drawingml/2006/main" r:embed="R1246605e959a49ea">
             <a:alphaModFix amt="20000"/>
             <a:duotone>
               <a:schemeClr val="accent4">
@@ -3180,10 +5895,10 @@
   </p:cSld>
   <p:clrMap bg1="lt1" tx1="dk1" bg2="lt2" tx2="dk2" accent1="accent1" accent2="accent2" accent3="accent3" accent4="accent4" accent5="accent5" accent6="accent6" hlink="hlink" folHlink="folHlink"/>
   <p:sldLayoutIdLst>
-    <p:sldLayoutId xmlns:r="http://schemas.openxmlformats.org/officeDocument/2006/relationships" id="2147483649" r:id="R55cb474568ed4261"/>
-    <p:sldLayoutId xmlns:r="http://schemas.openxmlformats.org/officeDocument/2006/relationships" id="2147483650" r:id="R3c201d6ca2184bf2"/>
-    <p:sldLayoutId xmlns:r="http://schemas.openxmlformats.org/officeDocument/2006/relationships" id="2147483651" r:id="Re0432bc8226f45ce"/>
-    <p:sldLayoutId xmlns:r="http://schemas.openxmlformats.org/officeDocument/2006/relationships" id="2147483652" r:id="R1baafd05d21a4d85"/>
+    <p:sldLayoutId xmlns:r="http://schemas.openxmlformats.org/officeDocument/2006/relationships" id="2147483649" r:id="Rb0d1ae0e89344b97"/>
+    <p:sldLayoutId xmlns:r="http://schemas.openxmlformats.org/officeDocument/2006/relationships" id="2147483650" r:id="R04f133eae6e6464a"/>
+    <p:sldLayoutId xmlns:r="http://schemas.openxmlformats.org/officeDocument/2006/relationships" id="2147483651" r:id="Rb85529b62395403e"/>
+    <p:sldLayoutId xmlns:r="http://schemas.openxmlformats.org/officeDocument/2006/relationships" id="2147483652" r:id="R22b8ad0f573c4658"/>
   </p:sldLayoutIdLst>
   <p:hf hdr="0" ftr="0" dt="0"/>
   <p:txStyles>
@@ -5368,14 +8083,14 @@
       </p:sp>
       <p:pic>
         <p:nvPicPr>
-          <p:cNvPr id="17" name=""/>
+          <p:cNvPr id="18" name=""/>
           <p:cNvPicPr>
             <a:picLocks xmlns:a="http://schemas.openxmlformats.org/drawingml/2006/main" noChangeAspect="1"/>
           </p:cNvPicPr>
           <p:nvPr/>
         </p:nvPicPr>
         <p:blipFill>
-          <a:blip xmlns:r="http://schemas.openxmlformats.org/officeDocument/2006/relationships" xmlns:a="http://schemas.openxmlformats.org/drawingml/2006/main" r:embed="Rc1440cdadccb4abb"/>
+          <a:blip xmlns:r="http://schemas.openxmlformats.org/officeDocument/2006/relationships" xmlns:a="http://schemas.openxmlformats.org/drawingml/2006/main" r:embed="R29dcc187cb654799"/>
           <a:stretch xmlns:a="http://schemas.openxmlformats.org/drawingml/2006/main"/>
         </p:blipFill>
         <p:spPr>
@@ -5983,14 +8698,14 @@
       </p:sp>
       <p:pic>
         <p:nvPicPr>
-          <p:cNvPr id="14" name="p12-mi-ladder"/>
+          <p:cNvPr id="15" name="p12-mi-ladder"/>
           <p:cNvPicPr>
             <a:picLocks xmlns:a="http://schemas.openxmlformats.org/drawingml/2006/main" noChangeAspect="1"/>
           </p:cNvPicPr>
           <p:nvPr/>
         </p:nvPicPr>
         <p:blipFill>
-          <a:blip xmlns:r="http://schemas.openxmlformats.org/officeDocument/2006/relationships" xmlns:a="http://schemas.openxmlformats.org/drawingml/2006/main" r:embed="R40f78622f6ed4645"/>
+          <a:blip xmlns:r="http://schemas.openxmlformats.org/officeDocument/2006/relationships" xmlns:a="http://schemas.openxmlformats.org/drawingml/2006/main" r:embed="R1ff2e548cda24d1c"/>
           <a:stretch xmlns:a="http://schemas.openxmlformats.org/drawingml/2006/main"/>
         </p:blipFill>
         <p:spPr>
